--- a/master's thesis/TFM_MII_Cloud_AI_PublicData_MolinaCristian_2026.pptx
+++ b/master's thesis/TFM_MII_Cloud_AI_PublicData_MolinaCristian_2026.pptx
@@ -3601,8 +3601,8 @@
         </p:nvSpPr>
         <p:spPr>
           <a:xfrm>
-            <a:off x="5184578" y="1984092"/>
-            <a:ext cx="3573024" cy="2887970"/>
+            <a:off x="5480728" y="1984092"/>
+            <a:ext cx="3096344" cy="3365024"/>
           </a:xfrm>
           <a:prstGeom prst="rect">
             <a:avLst/>
@@ -3946,8 +3946,8 @@
         </p:nvSpPr>
         <p:spPr>
           <a:xfrm>
-            <a:off x="566928" y="1984092"/>
-            <a:ext cx="3717040" cy="3657411"/>
+            <a:off x="467544" y="1405635"/>
+            <a:ext cx="3717040" cy="353943"/>
           </a:xfrm>
           <a:prstGeom prst="rect">
             <a:avLst/>
@@ -3998,183 +3998,6 @@
               </a:solidFill>
             </a:endParaRPr>
           </a:p>
-          <a:p>
-            <a:pPr lvl="1">
-              <a:spcAft>
-                <a:spcPts val="800"/>
-              </a:spcAft>
-            </a:pPr>
-            <a:r>
-              <a:rPr lang="es-ES" sz="1400" dirty="0">
-                <a:solidFill>
-                  <a:srgbClr val="5A5A5A"/>
-                </a:solidFill>
-              </a:rPr>
-              <a:t>-Paso 1: ¿Se necesita predecir algo?</a:t>
-            </a:r>
-          </a:p>
-          <a:p>
-            <a:pPr lvl="1">
-              <a:spcAft>
-                <a:spcPts val="800"/>
-              </a:spcAft>
-            </a:pPr>
-            <a:r>
-              <a:rPr lang="es-ES" sz="1400" dirty="0">
-                <a:solidFill>
-                  <a:srgbClr val="5A5A5A"/>
-                </a:solidFill>
-              </a:rPr>
-              <a:t>SÍ (Supervisado) -&gt; Clasificación, Regresión, Series Temporales.</a:t>
-            </a:r>
-          </a:p>
-          <a:p>
-            <a:pPr lvl="1">
-              <a:spcAft>
-                <a:spcPts val="800"/>
-              </a:spcAft>
-            </a:pPr>
-            <a:r>
-              <a:rPr lang="es-ES" sz="1400" dirty="0">
-                <a:solidFill>
-                  <a:srgbClr val="5A5A5A"/>
-                </a:solidFill>
-              </a:rPr>
-              <a:t>NO (No supervisado) -&gt; Grupos (agrupamiento) o Anomalías. </a:t>
-            </a:r>
-          </a:p>
-          <a:p>
-            <a:pPr lvl="1">
-              <a:spcAft>
-                <a:spcPts val="800"/>
-              </a:spcAft>
-            </a:pPr>
-            <a:r>
-              <a:rPr lang="es-ES" sz="1400" dirty="0">
-                <a:solidFill>
-                  <a:srgbClr val="5A5A5A"/>
-                </a:solidFill>
-              </a:rPr>
-              <a:t>-Paso 2: ¿Qué tipo de datos tenemos?</a:t>
-            </a:r>
-          </a:p>
-          <a:p>
-            <a:pPr lvl="1">
-              <a:spcAft>
-                <a:spcPts val="800"/>
-              </a:spcAft>
-            </a:pPr>
-            <a:r>
-              <a:rPr lang="es-ES" sz="1400" dirty="0">
-                <a:solidFill>
-                  <a:srgbClr val="5A5A5A"/>
-                </a:solidFill>
-              </a:rPr>
-              <a:t>Simples (Estructurados): </a:t>
-            </a:r>
-            <a:r>
-              <a:rPr lang="es-ES" sz="1400" b="1" dirty="0">
-                <a:solidFill>
-                  <a:srgbClr val="5A5A5A"/>
-                </a:solidFill>
-              </a:rPr>
-              <a:t>Árboles, KNN, K-</a:t>
-            </a:r>
-            <a:r>
-              <a:rPr lang="es-ES" sz="1400" b="1" dirty="0" err="1">
-                <a:solidFill>
-                  <a:srgbClr val="5A5A5A"/>
-                </a:solidFill>
-              </a:rPr>
-              <a:t>means</a:t>
-            </a:r>
-            <a:r>
-              <a:rPr lang="es-ES" sz="1400" b="1" dirty="0">
-                <a:solidFill>
-                  <a:srgbClr val="5A5A5A"/>
-                </a:solidFill>
-              </a:rPr>
-              <a:t>.</a:t>
-            </a:r>
-          </a:p>
-          <a:p>
-            <a:pPr lvl="1">
-              <a:spcAft>
-                <a:spcPts val="800"/>
-              </a:spcAft>
-            </a:pPr>
-            <a:r>
-              <a:rPr lang="es-ES" sz="1400" dirty="0">
-                <a:solidFill>
-                  <a:srgbClr val="5A5A5A"/>
-                </a:solidFill>
-              </a:rPr>
-              <a:t>Intermedios: </a:t>
-            </a:r>
-            <a:r>
-              <a:rPr lang="es-ES" sz="1400" dirty="0" err="1">
-                <a:solidFill>
-                  <a:srgbClr val="5A5A5A"/>
-                </a:solidFill>
-              </a:rPr>
-              <a:t>Ensembles</a:t>
-            </a:r>
-            <a:r>
-              <a:rPr lang="es-ES" sz="1400" dirty="0">
-                <a:solidFill>
-                  <a:srgbClr val="5A5A5A"/>
-                </a:solidFill>
-              </a:rPr>
-              <a:t> (Random Forest, </a:t>
-            </a:r>
-            <a:r>
-              <a:rPr lang="es-ES" sz="1400" dirty="0" err="1">
-                <a:solidFill>
-                  <a:srgbClr val="5A5A5A"/>
-                </a:solidFill>
-              </a:rPr>
-              <a:t>XGBoost</a:t>
-            </a:r>
-            <a:r>
-              <a:rPr lang="es-ES" sz="1400" dirty="0">
-                <a:solidFill>
-                  <a:srgbClr val="5A5A5A"/>
-                </a:solidFill>
-              </a:rPr>
-              <a:t>), DBSCAN.</a:t>
-            </a:r>
-          </a:p>
-          <a:p>
-            <a:pPr lvl="1">
-              <a:spcAft>
-                <a:spcPts val="800"/>
-              </a:spcAft>
-            </a:pPr>
-            <a:r>
-              <a:rPr lang="es-ES" sz="1400" dirty="0">
-                <a:solidFill>
-                  <a:srgbClr val="5A5A5A"/>
-                </a:solidFill>
-              </a:rPr>
-              <a:t>Complejos (Texto/Imágenes): Redes Neuronales, </a:t>
-            </a:r>
-            <a:r>
-              <a:rPr lang="es-ES" sz="1400" dirty="0" err="1">
-                <a:solidFill>
-                  <a:srgbClr val="5A5A5A"/>
-                </a:solidFill>
-              </a:rPr>
-              <a:t>LLMs</a:t>
-            </a:r>
-            <a:r>
-              <a:rPr lang="es-ES" sz="1400" dirty="0">
-                <a:solidFill>
-                  <a:srgbClr val="5A5A5A"/>
-                </a:solidFill>
-              </a:rPr>
-              <a:t>.</a:t>
-            </a:r>
-          </a:p>
         </p:txBody>
       </p:sp>
       <p:cxnSp>
@@ -4191,7 +4014,7 @@
         </p:nvCxnSpPr>
         <p:spPr>
           <a:xfrm>
-            <a:off x="4499992" y="1984092"/>
+            <a:off x="5076056" y="2012597"/>
             <a:ext cx="0" cy="3600400"/>
           </a:xfrm>
           <a:prstGeom prst="line">
@@ -4213,6 +4036,987 @@
           </a:fontRef>
         </p:style>
       </p:cxnSp>
+      <p:sp>
+        <p:nvSpPr>
+          <p:cNvPr id="8" name="TextBox 9">
+            <a:extLst>
+              <a:ext uri="{FF2B5EF4-FFF2-40B4-BE49-F238E27FC236}">
+                <a16:creationId xmlns:a16="http://schemas.microsoft.com/office/drawing/2014/main" id="{D6754C58-53F2-FACB-B9B7-7E881C73ADB0}"/>
+              </a:ext>
+            </a:extLst>
+          </p:cNvPr>
+          <p:cNvSpPr txBox="1"/>
+          <p:nvPr/>
+        </p:nvSpPr>
+        <p:spPr>
+          <a:xfrm>
+            <a:off x="616392" y="1835221"/>
+            <a:ext cx="3895344" cy="184666"/>
+          </a:xfrm>
+          <a:prstGeom prst="rect">
+            <a:avLst/>
+          </a:prstGeom>
+          <a:noFill/>
+        </p:spPr>
+        <p:txBody>
+          <a:bodyPr wrap="square" lIns="0" tIns="0" rIns="0" bIns="0">
+            <a:spAutoFit/>
+          </a:bodyPr>
+          <a:lstStyle/>
+          <a:p>
+            <a:r>
+              <a:rPr sz="1200" b="1" dirty="0">
+                <a:solidFill>
+                  <a:srgbClr val="6A6A6A"/>
+                </a:solidFill>
+                <a:latin typeface="Calibri"/>
+              </a:rPr>
+              <a:t>PASO 1 · ¿Hay </a:t>
+            </a:r>
+            <a:r>
+              <a:rPr sz="1200" b="1" dirty="0" err="1">
+                <a:solidFill>
+                  <a:srgbClr val="6A6A6A"/>
+                </a:solidFill>
+                <a:latin typeface="Calibri"/>
+              </a:rPr>
+              <a:t>que</a:t>
+            </a:r>
+            <a:r>
+              <a:rPr sz="1200" b="1" dirty="0">
+                <a:solidFill>
+                  <a:srgbClr val="6A6A6A"/>
+                </a:solidFill>
+                <a:latin typeface="Calibri"/>
+              </a:rPr>
+              <a:t> </a:t>
+            </a:r>
+            <a:r>
+              <a:rPr sz="1200" b="1" dirty="0" err="1">
+                <a:solidFill>
+                  <a:srgbClr val="6A6A6A"/>
+                </a:solidFill>
+                <a:latin typeface="Calibri"/>
+              </a:rPr>
+              <a:t>predecir</a:t>
+            </a:r>
+            <a:r>
+              <a:rPr sz="1200" b="1" dirty="0">
+                <a:solidFill>
+                  <a:srgbClr val="6A6A6A"/>
+                </a:solidFill>
+                <a:latin typeface="Calibri"/>
+              </a:rPr>
+              <a:t> algo?</a:t>
+            </a:r>
+          </a:p>
+        </p:txBody>
+      </p:sp>
+      <p:sp>
+        <p:nvSpPr>
+          <p:cNvPr id="11" name="Rounded Rectangle 10">
+            <a:extLst>
+              <a:ext uri="{FF2B5EF4-FFF2-40B4-BE49-F238E27FC236}">
+                <a16:creationId xmlns:a16="http://schemas.microsoft.com/office/drawing/2014/main" id="{7A631C3B-7A27-B338-8B56-8FB21C0F784A}"/>
+              </a:ext>
+            </a:extLst>
+          </p:cNvPr>
+          <p:cNvSpPr/>
+          <p:nvPr/>
+        </p:nvSpPr>
+        <p:spPr>
+          <a:xfrm>
+            <a:off x="616392" y="2091253"/>
+            <a:ext cx="1874519" cy="347472"/>
+          </a:xfrm>
+          <a:prstGeom prst="roundRect">
+            <a:avLst/>
+          </a:prstGeom>
+          <a:solidFill>
+            <a:srgbClr val="F1F1F1"/>
+          </a:solidFill>
+          <a:ln w="9525">
+            <a:solidFill>
+              <a:srgbClr val="BBBBBB"/>
+            </a:solidFill>
+          </a:ln>
+          <a:effectLst/>
+        </p:spPr>
+        <p:style>
+          <a:lnRef idx="1">
+            <a:schemeClr val="accent1"/>
+          </a:lnRef>
+          <a:fillRef idx="3">
+            <a:schemeClr val="accent1"/>
+          </a:fillRef>
+          <a:effectRef idx="2">
+            <a:schemeClr val="accent1"/>
+          </a:effectRef>
+          <a:fontRef idx="minor">
+            <a:schemeClr val="lt1"/>
+          </a:fontRef>
+        </p:style>
+        <p:txBody>
+          <a:bodyPr wrap="square" lIns="45720" tIns="9144" rIns="45720" bIns="9144" rtlCol="0" anchor="ctr"/>
+          <a:lstStyle/>
+          <a:p>
+            <a:pPr algn="ctr"/>
+            <a:r>
+              <a:rPr sz="1200" b="1" dirty="0">
+                <a:solidFill>
+                  <a:srgbClr val="1F1F1F"/>
+                </a:solidFill>
+                <a:latin typeface="Calibri"/>
+              </a:rPr>
+              <a:t>SÍ </a:t>
+            </a:r>
+            <a:r>
+              <a:rPr lang="es-ES" sz="1200" b="1" dirty="0">
+                <a:solidFill>
+                  <a:srgbClr val="1F1F1F"/>
+                </a:solidFill>
+                <a:latin typeface="Calibri"/>
+              </a:rPr>
+              <a:t>-&gt;</a:t>
+            </a:r>
+            <a:r>
+              <a:rPr sz="1200" b="1" dirty="0">
+                <a:solidFill>
+                  <a:srgbClr val="1F1F1F"/>
+                </a:solidFill>
+                <a:latin typeface="Calibri"/>
+              </a:rPr>
+              <a:t> </a:t>
+            </a:r>
+            <a:r>
+              <a:rPr sz="1200" b="1" dirty="0" err="1">
+                <a:solidFill>
+                  <a:srgbClr val="1F1F1F"/>
+                </a:solidFill>
+                <a:latin typeface="Calibri"/>
+              </a:rPr>
+              <a:t>Supervisado</a:t>
+            </a:r>
+            <a:endParaRPr sz="1200" b="1" dirty="0">
+              <a:solidFill>
+                <a:srgbClr val="1F1F1F"/>
+              </a:solidFill>
+              <a:latin typeface="Calibri"/>
+            </a:endParaRPr>
+          </a:p>
+        </p:txBody>
+      </p:sp>
+      <p:sp>
+        <p:nvSpPr>
+          <p:cNvPr id="13" name="Rounded Rectangle 11">
+            <a:extLst>
+              <a:ext uri="{FF2B5EF4-FFF2-40B4-BE49-F238E27FC236}">
+                <a16:creationId xmlns:a16="http://schemas.microsoft.com/office/drawing/2014/main" id="{9698069D-A25E-0823-FA9E-ADD1B942EFD3}"/>
+              </a:ext>
+            </a:extLst>
+          </p:cNvPr>
+          <p:cNvSpPr/>
+          <p:nvPr/>
+        </p:nvSpPr>
+        <p:spPr>
+          <a:xfrm>
+            <a:off x="2637216" y="2091253"/>
+            <a:ext cx="1874519" cy="347472"/>
+          </a:xfrm>
+          <a:prstGeom prst="roundRect">
+            <a:avLst/>
+          </a:prstGeom>
+          <a:solidFill>
+            <a:srgbClr val="C00530"/>
+          </a:solidFill>
+          <a:ln w="9525">
+            <a:solidFill>
+              <a:srgbClr val="C00530"/>
+            </a:solidFill>
+          </a:ln>
+          <a:effectLst/>
+        </p:spPr>
+        <p:style>
+          <a:lnRef idx="1">
+            <a:schemeClr val="accent1"/>
+          </a:lnRef>
+          <a:fillRef idx="3">
+            <a:schemeClr val="accent1"/>
+          </a:fillRef>
+          <a:effectRef idx="2">
+            <a:schemeClr val="accent1"/>
+          </a:effectRef>
+          <a:fontRef idx="minor">
+            <a:schemeClr val="lt1"/>
+          </a:fontRef>
+        </p:style>
+        <p:txBody>
+          <a:bodyPr wrap="square" lIns="45720" tIns="9144" rIns="45720" bIns="9144" rtlCol="0" anchor="ctr"/>
+          <a:lstStyle/>
+          <a:p>
+            <a:pPr algn="ctr"/>
+            <a:r>
+              <a:rPr sz="1200" b="1" dirty="0">
+                <a:solidFill>
+                  <a:srgbClr val="FFFFFF"/>
+                </a:solidFill>
+                <a:latin typeface="Calibri"/>
+              </a:rPr>
+              <a:t>NO </a:t>
+            </a:r>
+            <a:r>
+              <a:rPr lang="es-ES" sz="1200" b="1" dirty="0">
+                <a:solidFill>
+                  <a:srgbClr val="FFFFFF"/>
+                </a:solidFill>
+                <a:latin typeface="Calibri"/>
+              </a:rPr>
+              <a:t>-&gt;</a:t>
+            </a:r>
+            <a:r>
+              <a:rPr sz="1200" b="1" dirty="0">
+                <a:solidFill>
+                  <a:srgbClr val="FFFFFF"/>
+                </a:solidFill>
+                <a:latin typeface="Calibri"/>
+              </a:rPr>
+              <a:t> No </a:t>
+            </a:r>
+            <a:r>
+              <a:rPr sz="1200" b="1" dirty="0" err="1">
+                <a:solidFill>
+                  <a:srgbClr val="FFFFFF"/>
+                </a:solidFill>
+                <a:latin typeface="Calibri"/>
+              </a:rPr>
+              <a:t>supervisado</a:t>
+            </a:r>
+            <a:endParaRPr sz="1200" b="1" dirty="0">
+              <a:solidFill>
+                <a:srgbClr val="FFFFFF"/>
+              </a:solidFill>
+              <a:latin typeface="Calibri"/>
+            </a:endParaRPr>
+          </a:p>
+        </p:txBody>
+      </p:sp>
+      <p:sp>
+        <p:nvSpPr>
+          <p:cNvPr id="15" name="Rectangle 12">
+            <a:extLst>
+              <a:ext uri="{FF2B5EF4-FFF2-40B4-BE49-F238E27FC236}">
+                <a16:creationId xmlns:a16="http://schemas.microsoft.com/office/drawing/2014/main" id="{56863296-3A58-2D55-3E01-B43673E17B88}"/>
+              </a:ext>
+            </a:extLst>
+          </p:cNvPr>
+          <p:cNvSpPr/>
+          <p:nvPr/>
+        </p:nvSpPr>
+        <p:spPr>
+          <a:xfrm>
+            <a:off x="1553652" y="2438725"/>
+            <a:ext cx="10058" cy="128016"/>
+          </a:xfrm>
+          <a:prstGeom prst="rect">
+            <a:avLst/>
+          </a:prstGeom>
+          <a:solidFill>
+            <a:srgbClr val="BBBBBB"/>
+          </a:solidFill>
+          <a:ln>
+            <a:noFill/>
+          </a:ln>
+          <a:effectLst/>
+        </p:spPr>
+        <p:style>
+          <a:lnRef idx="1">
+            <a:schemeClr val="accent1"/>
+          </a:lnRef>
+          <a:fillRef idx="3">
+            <a:schemeClr val="accent1"/>
+          </a:fillRef>
+          <a:effectRef idx="2">
+            <a:schemeClr val="accent1"/>
+          </a:effectRef>
+          <a:fontRef idx="minor">
+            <a:schemeClr val="lt1"/>
+          </a:fontRef>
+        </p:style>
+        <p:txBody>
+          <a:bodyPr rtlCol="0" anchor="ctr"/>
+          <a:lstStyle/>
+          <a:p>
+            <a:pPr algn="ctr"/>
+            <a:endParaRPr sz="1200"/>
+          </a:p>
+        </p:txBody>
+      </p:sp>
+      <p:sp>
+        <p:nvSpPr>
+          <p:cNvPr id="17" name="Rectangle 13">
+            <a:extLst>
+              <a:ext uri="{FF2B5EF4-FFF2-40B4-BE49-F238E27FC236}">
+                <a16:creationId xmlns:a16="http://schemas.microsoft.com/office/drawing/2014/main" id="{1D1BDC30-4348-6E2C-6490-BA0FAD3FB403}"/>
+              </a:ext>
+            </a:extLst>
+          </p:cNvPr>
+          <p:cNvSpPr/>
+          <p:nvPr/>
+        </p:nvSpPr>
+        <p:spPr>
+          <a:xfrm>
+            <a:off x="3574476" y="2438725"/>
+            <a:ext cx="10058" cy="128016"/>
+          </a:xfrm>
+          <a:prstGeom prst="rect">
+            <a:avLst/>
+          </a:prstGeom>
+          <a:solidFill>
+            <a:srgbClr val="BBBBBB"/>
+          </a:solidFill>
+          <a:ln>
+            <a:noFill/>
+          </a:ln>
+          <a:effectLst/>
+        </p:spPr>
+        <p:style>
+          <a:lnRef idx="1">
+            <a:schemeClr val="accent1"/>
+          </a:lnRef>
+          <a:fillRef idx="3">
+            <a:schemeClr val="accent1"/>
+          </a:fillRef>
+          <a:effectRef idx="2">
+            <a:schemeClr val="accent1"/>
+          </a:effectRef>
+          <a:fontRef idx="minor">
+            <a:schemeClr val="lt1"/>
+          </a:fontRef>
+        </p:style>
+        <p:txBody>
+          <a:bodyPr rtlCol="0" anchor="ctr"/>
+          <a:lstStyle/>
+          <a:p>
+            <a:pPr algn="ctr"/>
+            <a:endParaRPr sz="1200"/>
+          </a:p>
+        </p:txBody>
+      </p:sp>
+      <p:sp>
+        <p:nvSpPr>
+          <p:cNvPr id="19" name="Rounded Rectangle 14">
+            <a:extLst>
+              <a:ext uri="{FF2B5EF4-FFF2-40B4-BE49-F238E27FC236}">
+                <a16:creationId xmlns:a16="http://schemas.microsoft.com/office/drawing/2014/main" id="{0ABB9686-390B-A270-C0A5-6196ECE7A493}"/>
+              </a:ext>
+            </a:extLst>
+          </p:cNvPr>
+          <p:cNvSpPr/>
+          <p:nvPr/>
+        </p:nvSpPr>
+        <p:spPr>
+          <a:xfrm>
+            <a:off x="616392" y="2566741"/>
+            <a:ext cx="1874519" cy="493776"/>
+          </a:xfrm>
+          <a:prstGeom prst="roundRect">
+            <a:avLst/>
+          </a:prstGeom>
+          <a:solidFill>
+            <a:srgbClr val="FFFFFF"/>
+          </a:solidFill>
+          <a:ln w="9525">
+            <a:solidFill>
+              <a:srgbClr val="BBBBBB"/>
+            </a:solidFill>
+          </a:ln>
+          <a:effectLst/>
+        </p:spPr>
+        <p:style>
+          <a:lnRef idx="1">
+            <a:schemeClr val="accent1"/>
+          </a:lnRef>
+          <a:fillRef idx="3">
+            <a:schemeClr val="accent1"/>
+          </a:fillRef>
+          <a:effectRef idx="2">
+            <a:schemeClr val="accent1"/>
+          </a:effectRef>
+          <a:fontRef idx="minor">
+            <a:schemeClr val="lt1"/>
+          </a:fontRef>
+        </p:style>
+        <p:txBody>
+          <a:bodyPr wrap="square" lIns="45720" tIns="9144" rIns="45720" bIns="9144" rtlCol="0" anchor="ctr"/>
+          <a:lstStyle/>
+          <a:p>
+            <a:pPr algn="ctr"/>
+            <a:r>
+              <a:rPr sz="1200" b="0">
+                <a:solidFill>
+                  <a:srgbClr val="6A6A6A"/>
+                </a:solidFill>
+                <a:latin typeface="Calibri"/>
+              </a:rPr>
+              <a:t>Clasificación · Regresión
+Series temporales</a:t>
+            </a:r>
+          </a:p>
+        </p:txBody>
+      </p:sp>
+      <p:sp>
+        <p:nvSpPr>
+          <p:cNvPr id="21" name="Rounded Rectangle 15">
+            <a:extLst>
+              <a:ext uri="{FF2B5EF4-FFF2-40B4-BE49-F238E27FC236}">
+                <a16:creationId xmlns:a16="http://schemas.microsoft.com/office/drawing/2014/main" id="{961E08F9-D27F-910C-09AE-06A709D16698}"/>
+              </a:ext>
+            </a:extLst>
+          </p:cNvPr>
+          <p:cNvSpPr/>
+          <p:nvPr/>
+        </p:nvSpPr>
+        <p:spPr>
+          <a:xfrm>
+            <a:off x="2637216" y="2566741"/>
+            <a:ext cx="1874519" cy="493776"/>
+          </a:xfrm>
+          <a:prstGeom prst="roundRect">
+            <a:avLst/>
+          </a:prstGeom>
+          <a:solidFill>
+            <a:srgbClr val="C00530"/>
+          </a:solidFill>
+          <a:ln w="9525">
+            <a:solidFill>
+              <a:srgbClr val="BBBBBB"/>
+            </a:solidFill>
+          </a:ln>
+          <a:effectLst/>
+        </p:spPr>
+        <p:style>
+          <a:lnRef idx="1">
+            <a:schemeClr val="accent1"/>
+          </a:lnRef>
+          <a:fillRef idx="3">
+            <a:schemeClr val="accent1"/>
+          </a:fillRef>
+          <a:effectRef idx="2">
+            <a:schemeClr val="accent1"/>
+          </a:effectRef>
+          <a:fontRef idx="minor">
+            <a:schemeClr val="lt1"/>
+          </a:fontRef>
+        </p:style>
+        <p:txBody>
+          <a:bodyPr wrap="square" lIns="45720" tIns="9144" rIns="45720" bIns="9144" rtlCol="0" anchor="ctr"/>
+          <a:lstStyle/>
+          <a:p>
+            <a:pPr algn="ctr"/>
+            <a:r>
+              <a:rPr sz="1200" b="1" dirty="0" err="1">
+                <a:solidFill>
+                  <a:schemeClr val="bg1"/>
+                </a:solidFill>
+                <a:latin typeface="Calibri"/>
+              </a:rPr>
+              <a:t>Agrupamiento</a:t>
+            </a:r>
+            <a:r>
+              <a:rPr sz="1200" b="1" dirty="0">
+                <a:solidFill>
+                  <a:schemeClr val="bg1"/>
+                </a:solidFill>
+                <a:latin typeface="Calibri"/>
+              </a:rPr>
+              <a:t>
+</a:t>
+            </a:r>
+            <a:r>
+              <a:rPr sz="1200" b="1" dirty="0" err="1">
+                <a:solidFill>
+                  <a:schemeClr val="bg1"/>
+                </a:solidFill>
+                <a:latin typeface="Calibri"/>
+              </a:rPr>
+              <a:t>Detección</a:t>
+            </a:r>
+            <a:r>
+              <a:rPr sz="1200" b="1" dirty="0">
+                <a:solidFill>
+                  <a:schemeClr val="bg1"/>
+                </a:solidFill>
+                <a:latin typeface="Calibri"/>
+              </a:rPr>
+              <a:t> de </a:t>
+            </a:r>
+            <a:r>
+              <a:rPr sz="1200" b="1" dirty="0" err="1">
+                <a:solidFill>
+                  <a:schemeClr val="bg1"/>
+                </a:solidFill>
+                <a:latin typeface="Calibri"/>
+              </a:rPr>
+              <a:t>anomalías</a:t>
+            </a:r>
+            <a:endParaRPr sz="1200" b="1" dirty="0">
+              <a:solidFill>
+                <a:schemeClr val="bg1"/>
+              </a:solidFill>
+              <a:latin typeface="Calibri"/>
+            </a:endParaRPr>
+          </a:p>
+        </p:txBody>
+      </p:sp>
+      <p:sp>
+        <p:nvSpPr>
+          <p:cNvPr id="23" name="TextBox 16">
+            <a:extLst>
+              <a:ext uri="{FF2B5EF4-FFF2-40B4-BE49-F238E27FC236}">
+                <a16:creationId xmlns:a16="http://schemas.microsoft.com/office/drawing/2014/main" id="{E9A33DDB-05A5-CA23-B2D6-0FC5D861532D}"/>
+              </a:ext>
+            </a:extLst>
+          </p:cNvPr>
+          <p:cNvSpPr txBox="1"/>
+          <p:nvPr/>
+        </p:nvSpPr>
+        <p:spPr>
+          <a:xfrm>
+            <a:off x="616392" y="3261685"/>
+            <a:ext cx="3895344" cy="184666"/>
+          </a:xfrm>
+          <a:prstGeom prst="rect">
+            <a:avLst/>
+          </a:prstGeom>
+          <a:noFill/>
+        </p:spPr>
+        <p:txBody>
+          <a:bodyPr wrap="square" lIns="0" tIns="0" rIns="0" bIns="0">
+            <a:spAutoFit/>
+          </a:bodyPr>
+          <a:lstStyle/>
+          <a:p>
+            <a:r>
+              <a:rPr sz="1200" b="1">
+                <a:solidFill>
+                  <a:srgbClr val="6A6A6A"/>
+                </a:solidFill>
+                <a:latin typeface="Calibri"/>
+              </a:rPr>
+              <a:t>PASO 2 · ¿Qué complejidad tienen los datos?</a:t>
+            </a:r>
+          </a:p>
+        </p:txBody>
+      </p:sp>
+      <p:sp>
+        <p:nvSpPr>
+          <p:cNvPr id="25" name="Rounded Rectangle 17">
+            <a:extLst>
+              <a:ext uri="{FF2B5EF4-FFF2-40B4-BE49-F238E27FC236}">
+                <a16:creationId xmlns:a16="http://schemas.microsoft.com/office/drawing/2014/main" id="{4EE2F852-B7B2-DF30-A7D2-778AAD171D1D}"/>
+              </a:ext>
+            </a:extLst>
+          </p:cNvPr>
+          <p:cNvSpPr/>
+          <p:nvPr/>
+        </p:nvSpPr>
+        <p:spPr>
+          <a:xfrm>
+            <a:off x="616392" y="3517717"/>
+            <a:ext cx="3895344" cy="420624"/>
+          </a:xfrm>
+          <a:prstGeom prst="roundRect">
+            <a:avLst/>
+          </a:prstGeom>
+          <a:solidFill>
+            <a:srgbClr val="C00530"/>
+          </a:solidFill>
+          <a:ln w="9525">
+            <a:solidFill>
+              <a:srgbClr val="C00530"/>
+            </a:solidFill>
+          </a:ln>
+          <a:effectLst/>
+        </p:spPr>
+        <p:style>
+          <a:lnRef idx="1">
+            <a:schemeClr val="accent1"/>
+          </a:lnRef>
+          <a:fillRef idx="3">
+            <a:schemeClr val="accent1"/>
+          </a:fillRef>
+          <a:effectRef idx="2">
+            <a:schemeClr val="accent1"/>
+          </a:effectRef>
+          <a:fontRef idx="minor">
+            <a:schemeClr val="lt1"/>
+          </a:fontRef>
+        </p:style>
+        <p:txBody>
+          <a:bodyPr wrap="square" lIns="45720" tIns="9144" rIns="45720" bIns="9144" rtlCol="0" anchor="ctr"/>
+          <a:lstStyle/>
+          <a:p>
+            <a:pPr algn="ctr"/>
+            <a:r>
+              <a:rPr sz="1200" b="1" dirty="0">
+                <a:solidFill>
+                  <a:srgbClr val="FFFFFF"/>
+                </a:solidFill>
+                <a:latin typeface="Calibri"/>
+              </a:rPr>
+              <a:t>Simples (</a:t>
+            </a:r>
+            <a:r>
+              <a:rPr sz="1200" b="1" dirty="0" err="1">
+                <a:solidFill>
+                  <a:srgbClr val="FFFFFF"/>
+                </a:solidFill>
+                <a:latin typeface="Calibri"/>
+              </a:rPr>
+              <a:t>estructurados</a:t>
+            </a:r>
+            <a:r>
+              <a:rPr sz="1200" b="1" dirty="0">
+                <a:solidFill>
+                  <a:srgbClr val="FFFFFF"/>
+                </a:solidFill>
+                <a:latin typeface="Calibri"/>
+              </a:rPr>
+              <a:t>) → </a:t>
+            </a:r>
+            <a:r>
+              <a:rPr sz="1200" b="1" dirty="0" err="1">
+                <a:solidFill>
+                  <a:srgbClr val="FFFFFF"/>
+                </a:solidFill>
+                <a:latin typeface="Calibri"/>
+              </a:rPr>
+              <a:t>Árboles</a:t>
+            </a:r>
+            <a:r>
+              <a:rPr sz="1200" b="1" dirty="0">
+                <a:solidFill>
+                  <a:srgbClr val="FFFFFF"/>
+                </a:solidFill>
+                <a:latin typeface="Calibri"/>
+              </a:rPr>
+              <a:t> · KNN · k-means</a:t>
+            </a:r>
+          </a:p>
+        </p:txBody>
+      </p:sp>
+      <p:sp>
+        <p:nvSpPr>
+          <p:cNvPr id="27" name="Rounded Rectangle 18">
+            <a:extLst>
+              <a:ext uri="{FF2B5EF4-FFF2-40B4-BE49-F238E27FC236}">
+                <a16:creationId xmlns:a16="http://schemas.microsoft.com/office/drawing/2014/main" id="{FED24BCC-33B5-DD59-0E28-373BACDA4EF6}"/>
+              </a:ext>
+            </a:extLst>
+          </p:cNvPr>
+          <p:cNvSpPr/>
+          <p:nvPr/>
+        </p:nvSpPr>
+        <p:spPr>
+          <a:xfrm>
+            <a:off x="616392" y="3993205"/>
+            <a:ext cx="3895344" cy="420624"/>
+          </a:xfrm>
+          <a:prstGeom prst="roundRect">
+            <a:avLst/>
+          </a:prstGeom>
+          <a:solidFill>
+            <a:srgbClr val="F1F1F1"/>
+          </a:solidFill>
+          <a:ln w="9525">
+            <a:solidFill>
+              <a:srgbClr val="BBBBBB"/>
+            </a:solidFill>
+          </a:ln>
+          <a:effectLst/>
+        </p:spPr>
+        <p:style>
+          <a:lnRef idx="1">
+            <a:schemeClr val="accent1"/>
+          </a:lnRef>
+          <a:fillRef idx="3">
+            <a:schemeClr val="accent1"/>
+          </a:fillRef>
+          <a:effectRef idx="2">
+            <a:schemeClr val="accent1"/>
+          </a:effectRef>
+          <a:fontRef idx="minor">
+            <a:schemeClr val="lt1"/>
+          </a:fontRef>
+        </p:style>
+        <p:txBody>
+          <a:bodyPr wrap="square" lIns="45720" tIns="9144" rIns="45720" bIns="9144" rtlCol="0" anchor="ctr"/>
+          <a:lstStyle/>
+          <a:p>
+            <a:pPr algn="ctr"/>
+            <a:r>
+              <a:rPr sz="1200" b="0">
+                <a:solidFill>
+                  <a:srgbClr val="1F1F1F"/>
+                </a:solidFill>
+                <a:latin typeface="Calibri"/>
+              </a:rPr>
+              <a:t>Intermedios → Random Forest · XGBoost · DBSCAN</a:t>
+            </a:r>
+          </a:p>
+        </p:txBody>
+      </p:sp>
+      <p:sp>
+        <p:nvSpPr>
+          <p:cNvPr id="29" name="Rounded Rectangle 19">
+            <a:extLst>
+              <a:ext uri="{FF2B5EF4-FFF2-40B4-BE49-F238E27FC236}">
+                <a16:creationId xmlns:a16="http://schemas.microsoft.com/office/drawing/2014/main" id="{46D59DEE-01BE-5735-4723-A4E8563F1EA7}"/>
+              </a:ext>
+            </a:extLst>
+          </p:cNvPr>
+          <p:cNvSpPr/>
+          <p:nvPr/>
+        </p:nvSpPr>
+        <p:spPr>
+          <a:xfrm>
+            <a:off x="616392" y="4468693"/>
+            <a:ext cx="3895344" cy="420624"/>
+          </a:xfrm>
+          <a:prstGeom prst="roundRect">
+            <a:avLst/>
+          </a:prstGeom>
+          <a:solidFill>
+            <a:srgbClr val="F1F1F1"/>
+          </a:solidFill>
+          <a:ln w="9525">
+            <a:solidFill>
+              <a:srgbClr val="BBBBBB"/>
+            </a:solidFill>
+          </a:ln>
+          <a:effectLst/>
+        </p:spPr>
+        <p:style>
+          <a:lnRef idx="1">
+            <a:schemeClr val="accent1"/>
+          </a:lnRef>
+          <a:fillRef idx="3">
+            <a:schemeClr val="accent1"/>
+          </a:fillRef>
+          <a:effectRef idx="2">
+            <a:schemeClr val="accent1"/>
+          </a:effectRef>
+          <a:fontRef idx="minor">
+            <a:schemeClr val="lt1"/>
+          </a:fontRef>
+        </p:style>
+        <p:txBody>
+          <a:bodyPr wrap="square" lIns="45720" tIns="9144" rIns="45720" bIns="9144" rtlCol="0" anchor="ctr"/>
+          <a:lstStyle/>
+          <a:p>
+            <a:pPr algn="ctr"/>
+            <a:r>
+              <a:rPr sz="1200" b="0">
+                <a:solidFill>
+                  <a:srgbClr val="1F1F1F"/>
+                </a:solidFill>
+                <a:latin typeface="Calibri"/>
+              </a:rPr>
+              <a:t>Complejos (texto/imagen) → Redes neuronales · LLM</a:t>
+            </a:r>
+          </a:p>
+        </p:txBody>
+      </p:sp>
+      <p:sp>
+        <p:nvSpPr>
+          <p:cNvPr id="33" name="TextBox 21">
+            <a:extLst>
+              <a:ext uri="{FF2B5EF4-FFF2-40B4-BE49-F238E27FC236}">
+                <a16:creationId xmlns:a16="http://schemas.microsoft.com/office/drawing/2014/main" id="{5B2BF73A-1615-C5BC-884A-6D86FF0366AB}"/>
+              </a:ext>
+            </a:extLst>
+          </p:cNvPr>
+          <p:cNvSpPr txBox="1"/>
+          <p:nvPr/>
+        </p:nvSpPr>
+        <p:spPr>
+          <a:xfrm>
+            <a:off x="2051720" y="4944181"/>
+            <a:ext cx="3895344" cy="169277"/>
+          </a:xfrm>
+          <a:prstGeom prst="rect">
+            <a:avLst/>
+          </a:prstGeom>
+          <a:noFill/>
+        </p:spPr>
+        <p:txBody>
+          <a:bodyPr wrap="square" lIns="0" tIns="0" rIns="0" bIns="0">
+            <a:spAutoFit/>
+          </a:bodyPr>
+          <a:lstStyle/>
+          <a:p>
+            <a:r>
+              <a:rPr sz="1100" b="0" dirty="0">
+                <a:solidFill>
+                  <a:srgbClr val="6A6A6A"/>
+                </a:solidFill>
+                <a:latin typeface="Calibri"/>
+              </a:rPr>
+              <a:t>En rojo, el camino </a:t>
+            </a:r>
+            <a:r>
+              <a:rPr sz="1100" b="0" dirty="0" err="1">
+                <a:solidFill>
+                  <a:srgbClr val="6A6A6A"/>
+                </a:solidFill>
+                <a:latin typeface="Calibri"/>
+              </a:rPr>
+              <a:t>seguido</a:t>
+            </a:r>
+            <a:r>
+              <a:rPr sz="1100" b="0" dirty="0">
+                <a:solidFill>
+                  <a:srgbClr val="6A6A6A"/>
+                </a:solidFill>
+                <a:latin typeface="Calibri"/>
+              </a:rPr>
+              <a:t> </a:t>
+            </a:r>
+            <a:r>
+              <a:rPr sz="1100" b="0" dirty="0" err="1">
+                <a:solidFill>
+                  <a:srgbClr val="6A6A6A"/>
+                </a:solidFill>
+                <a:latin typeface="Calibri"/>
+              </a:rPr>
+              <a:t>en</a:t>
+            </a:r>
+            <a:r>
+              <a:rPr sz="1100" b="0" dirty="0">
+                <a:solidFill>
+                  <a:srgbClr val="6A6A6A"/>
+                </a:solidFill>
+                <a:latin typeface="Calibri"/>
+              </a:rPr>
+              <a:t> </a:t>
+            </a:r>
+            <a:r>
+              <a:rPr sz="1100" b="0" dirty="0" err="1">
+                <a:solidFill>
+                  <a:srgbClr val="6A6A6A"/>
+                </a:solidFill>
+                <a:latin typeface="Calibri"/>
+              </a:rPr>
+              <a:t>este</a:t>
+            </a:r>
+            <a:r>
+              <a:rPr sz="1100" b="0" dirty="0">
+                <a:solidFill>
+                  <a:srgbClr val="6A6A6A"/>
+                </a:solidFill>
+                <a:latin typeface="Calibri"/>
+              </a:rPr>
+              <a:t> </a:t>
+            </a:r>
+            <a:r>
+              <a:rPr sz="1100" b="0" dirty="0" err="1">
+                <a:solidFill>
+                  <a:srgbClr val="6A6A6A"/>
+                </a:solidFill>
+                <a:latin typeface="Calibri"/>
+              </a:rPr>
+              <a:t>trabajo</a:t>
+            </a:r>
+            <a:endParaRPr sz="1100" b="0" dirty="0">
+              <a:solidFill>
+                <a:srgbClr val="6A6A6A"/>
+              </a:solidFill>
+              <a:latin typeface="Calibri"/>
+            </a:endParaRPr>
+          </a:p>
+        </p:txBody>
+      </p:sp>
+      <p:sp>
+        <p:nvSpPr>
+          <p:cNvPr id="35" name="CuadroTexto 34">
+            <a:extLst>
+              <a:ext uri="{FF2B5EF4-FFF2-40B4-BE49-F238E27FC236}">
+                <a16:creationId xmlns:a16="http://schemas.microsoft.com/office/drawing/2014/main" id="{EB4FE9CB-3E43-6B09-E92A-530E95FBE289}"/>
+              </a:ext>
+            </a:extLst>
+          </p:cNvPr>
+          <p:cNvSpPr txBox="1"/>
+          <p:nvPr/>
+        </p:nvSpPr>
+        <p:spPr>
+          <a:xfrm>
+            <a:off x="462840" y="5428587"/>
+            <a:ext cx="4572000" cy="738664"/>
+          </a:xfrm>
+          <a:prstGeom prst="rect">
+            <a:avLst/>
+          </a:prstGeom>
+          <a:noFill/>
+        </p:spPr>
+        <p:txBody>
+          <a:bodyPr wrap="square">
+            <a:spAutoFit/>
+          </a:bodyPr>
+          <a:lstStyle/>
+          <a:p>
+            <a:r>
+              <a:rPr lang="es-ES" sz="1400" b="1" dirty="0">
+                <a:latin typeface="Calibri"/>
+              </a:rPr>
+              <a:t>Selección -&gt; no supervisado + datos estructurados</a:t>
+            </a:r>
+          </a:p>
+          <a:p>
+            <a:r>
+              <a:rPr lang="es-ES" sz="1400" b="1" dirty="0">
+                <a:latin typeface="Calibri"/>
+              </a:rPr>
+              <a:t>	k-</a:t>
+            </a:r>
+            <a:r>
+              <a:rPr lang="es-ES" sz="1400" b="1" dirty="0" err="1">
+                <a:latin typeface="Calibri"/>
+              </a:rPr>
+              <a:t>means</a:t>
+            </a:r>
+            <a:r>
+              <a:rPr lang="es-ES" sz="1400" b="1" dirty="0">
+                <a:latin typeface="Calibri"/>
+              </a:rPr>
+              <a:t> y agrupamiento de </a:t>
+            </a:r>
+            <a:r>
+              <a:rPr lang="es-ES" sz="1400" b="1" dirty="0" err="1">
+                <a:latin typeface="Calibri"/>
+              </a:rPr>
+              <a:t>Ward</a:t>
+            </a:r>
+            <a:r>
+              <a:rPr lang="es-ES" sz="1400" b="1" dirty="0" err="1">
+                <a:solidFill>
+                  <a:srgbClr val="FFFFFF"/>
+                </a:solidFill>
+                <a:latin typeface="Calibri"/>
+              </a:rPr>
+              <a:t>y</a:t>
+            </a:r>
+            <a:r>
+              <a:rPr lang="es-ES" sz="1400" b="1" dirty="0">
+                <a:solidFill>
+                  <a:srgbClr val="FFFFFF"/>
+                </a:solidFill>
+                <a:latin typeface="Calibri"/>
+              </a:rPr>
+              <a:t> agrupamiento de Ward</a:t>
+            </a:r>
+          </a:p>
+        </p:txBody>
+      </p:sp>
     </p:spTree>
   </p:cSld>
   <p:clrMapOvr>
@@ -16635,7 +17439,7 @@
           <p:nvPr>
             <p:extLst>
               <p:ext uri="{D42A27DB-BD31-4B8C-83A1-F6EECF244321}">
-                <p14:modId xmlns:p14="http://schemas.microsoft.com/office/powerpoint/2010/main" val="2620861461"/>
+                <p14:modId xmlns:p14="http://schemas.microsoft.com/office/powerpoint/2010/main" val="2046577085"/>
               </p:ext>
             </p:extLst>
           </p:nvPr>
@@ -17050,9 +17854,9 @@
                           <a:solidFill>
                             <a:srgbClr val="1F1F1F"/>
                           </a:solidFill>
-                          <a:latin typeface="Calibri"/>
-                        </a:rPr>
-                        <a:t>Al estado de la cuestión</a:t>
+                          <a:latin typeface="+mn-lt"/>
+                        </a:rPr>
+                        <a:t>A trabajos posteriores</a:t>
                       </a:r>
                       <a:endParaRPr sz="1400" b="0" dirty="0">
                         <a:solidFill>
@@ -18835,8 +19639,8 @@
         </p:nvSpPr>
         <p:spPr>
           <a:xfrm>
-            <a:off x="630431" y="1653240"/>
-            <a:ext cx="7946641" cy="3970318"/>
+            <a:off x="630431" y="1414174"/>
+            <a:ext cx="7946641" cy="4508927"/>
           </a:xfrm>
           <a:prstGeom prst="rect">
             <a:avLst/>
@@ -18849,6 +19653,593 @@
           </a:bodyPr>
           <a:lstStyle/>
           <a:p>
+            <a:pPr>
+              <a:lnSpc>
+                <a:spcPct val="150000"/>
+              </a:lnSpc>
+            </a:pPr>
+            <a:r>
+              <a:rPr lang="en-US" sz="1400" dirty="0"/>
+              <a:t>* La url del github tiene un typo (</a:t>
+            </a:r>
+            <a:r>
+              <a:rPr lang="en-US" sz="1400" dirty="0">
+                <a:hlinkClick r:id="rId4"/>
+              </a:rPr>
+              <a:t>https://github.com/crismo04/TFM-cloud-soliutions-to-public-data/</a:t>
+            </a:r>
+            <a:r>
+              <a:rPr lang="en-US" sz="1400" dirty="0"/>
+              <a:t>)</a:t>
+            </a:r>
+          </a:p>
+          <a:p>
+            <a:pPr>
+              <a:lnSpc>
+                <a:spcPct val="150000"/>
+              </a:lnSpc>
+            </a:pPr>
+            <a:r>
+              <a:rPr lang="en-US" sz="1400" dirty="0"/>
+              <a:t>*</a:t>
+            </a:r>
+            <a:r>
+              <a:rPr lang="en-US" sz="1400" dirty="0" err="1"/>
+              <a:t>unificar</a:t>
+            </a:r>
+            <a:r>
+              <a:rPr lang="en-US" sz="1400" dirty="0"/>
+              <a:t> </a:t>
+            </a:r>
+            <a:r>
+              <a:rPr lang="en-US" sz="1400" dirty="0" err="1"/>
+              <a:t>todo</a:t>
+            </a:r>
+            <a:r>
+              <a:rPr lang="en-US" sz="1400" dirty="0"/>
+              <a:t> a python o python3 (vertex </a:t>
+            </a:r>
+            <a:r>
+              <a:rPr lang="en-US" sz="1400" dirty="0" err="1"/>
+              <a:t>usa</a:t>
+            </a:r>
+            <a:r>
+              <a:rPr lang="en-US" sz="1400" dirty="0"/>
+              <a:t> python3) </a:t>
+            </a:r>
+          </a:p>
+          <a:p>
+            <a:pPr>
+              <a:lnSpc>
+                <a:spcPct val="150000"/>
+              </a:lnSpc>
+            </a:pPr>
+            <a:r>
+              <a:rPr lang="en-US" sz="1400" dirty="0"/>
+              <a:t>* Los enlaces clickables de la </a:t>
+            </a:r>
+            <a:r>
+              <a:rPr lang="en-US" sz="1400" dirty="0" err="1"/>
+              <a:t>introducción</a:t>
+            </a:r>
+            <a:r>
+              <a:rPr lang="en-US" sz="1400" dirty="0"/>
+              <a:t>, </a:t>
+            </a:r>
+            <a:r>
+              <a:rPr lang="en-US" sz="1400" dirty="0" err="1"/>
+              <a:t>en</a:t>
+            </a:r>
+            <a:r>
+              <a:rPr lang="en-US" sz="1400" dirty="0"/>
+              <a:t> </a:t>
+            </a:r>
+            <a:r>
+              <a:rPr lang="en-US" sz="1400" dirty="0" err="1"/>
+              <a:t>cursiva</a:t>
+            </a:r>
+            <a:r>
+              <a:rPr lang="en-US" sz="1400" dirty="0"/>
+              <a:t>.</a:t>
+            </a:r>
+          </a:p>
+          <a:p>
+            <a:pPr>
+              <a:lnSpc>
+                <a:spcPct val="150000"/>
+              </a:lnSpc>
+            </a:pPr>
+            <a:r>
+              <a:rPr lang="en-US" sz="1400" dirty="0"/>
+              <a:t>* Cambio </a:t>
+            </a:r>
+            <a:r>
+              <a:rPr lang="en-US" sz="1400" dirty="0" err="1"/>
+              <a:t>en</a:t>
+            </a:r>
+            <a:r>
+              <a:rPr lang="en-US" sz="1400" dirty="0"/>
+              <a:t> </a:t>
+            </a:r>
+            <a:r>
+              <a:rPr lang="en-US" sz="1400" dirty="0" err="1"/>
+              <a:t>algunos</a:t>
+            </a:r>
+            <a:r>
+              <a:rPr lang="en-US" sz="1400" dirty="0"/>
+              <a:t> </a:t>
+            </a:r>
+            <a:r>
+              <a:rPr lang="en-US" sz="1400" dirty="0" err="1"/>
+              <a:t>títulos</a:t>
+            </a:r>
+            <a:r>
+              <a:rPr lang="en-US" sz="1400" dirty="0"/>
+              <a:t> de </a:t>
+            </a:r>
+            <a:r>
+              <a:rPr lang="en-US" sz="1400" dirty="0" err="1"/>
+              <a:t>sección</a:t>
+            </a:r>
+            <a:r>
+              <a:rPr lang="en-US" sz="1400" dirty="0"/>
+              <a:t> para </a:t>
+            </a:r>
+            <a:r>
+              <a:rPr lang="en-US" sz="1400" dirty="0" err="1"/>
+              <a:t>evitar</a:t>
+            </a:r>
+            <a:r>
+              <a:rPr lang="en-US" sz="1400" dirty="0"/>
+              <a:t> </a:t>
+            </a:r>
+            <a:r>
+              <a:rPr lang="en-US" sz="1400" dirty="0" err="1"/>
+              <a:t>repetición</a:t>
+            </a:r>
+            <a:r>
+              <a:rPr lang="en-US" sz="1400" dirty="0"/>
+              <a:t>. </a:t>
+            </a:r>
+          </a:p>
+          <a:p>
+            <a:pPr>
+              <a:lnSpc>
+                <a:spcPct val="150000"/>
+              </a:lnSpc>
+            </a:pPr>
+            <a:r>
+              <a:rPr lang="en-US" sz="1400" dirty="0"/>
+              <a:t>* Se </a:t>
+            </a:r>
+            <a:r>
+              <a:rPr lang="en-US" sz="1400" dirty="0" err="1"/>
+              <a:t>redirige</a:t>
+            </a:r>
+            <a:r>
+              <a:rPr lang="en-US" sz="1400" dirty="0"/>
+              <a:t> a la </a:t>
+            </a:r>
+            <a:r>
+              <a:rPr lang="en-US" sz="1400" dirty="0" err="1"/>
+              <a:t>definición</a:t>
+            </a:r>
+            <a:r>
+              <a:rPr lang="en-US" sz="1400" dirty="0"/>
+              <a:t> de </a:t>
+            </a:r>
+            <a:r>
+              <a:rPr lang="en-US" sz="1400" dirty="0" err="1"/>
+              <a:t>arquitectura</a:t>
+            </a:r>
+            <a:r>
+              <a:rPr lang="en-US" sz="1400" dirty="0"/>
+              <a:t> de </a:t>
+            </a:r>
+            <a:r>
+              <a:rPr lang="en-US" sz="1400" dirty="0" err="1"/>
+              <a:t>medalla</a:t>
+            </a:r>
+            <a:r>
+              <a:rPr lang="en-US" sz="1400" dirty="0"/>
+              <a:t> </a:t>
+            </a:r>
+            <a:r>
+              <a:rPr lang="en-US" sz="1400" dirty="0" err="1"/>
+              <a:t>en</a:t>
+            </a:r>
+            <a:r>
+              <a:rPr lang="en-US" sz="1400" dirty="0"/>
+              <a:t> el </a:t>
+            </a:r>
+            <a:r>
+              <a:rPr lang="en-US" sz="1400" dirty="0" err="1"/>
+              <a:t>capítulo</a:t>
+            </a:r>
+            <a:r>
+              <a:rPr lang="en-US" sz="1400" dirty="0"/>
+              <a:t> de </a:t>
+            </a:r>
+            <a:r>
+              <a:rPr lang="en-US" sz="1400" dirty="0" err="1"/>
+              <a:t>estado</a:t>
+            </a:r>
+            <a:r>
+              <a:rPr lang="en-US" sz="1400" dirty="0"/>
+              <a:t> de la </a:t>
+            </a:r>
+            <a:r>
+              <a:rPr lang="en-US" sz="1400" dirty="0" err="1"/>
+              <a:t>cuestión</a:t>
+            </a:r>
+            <a:r>
+              <a:rPr lang="en-US" sz="1400" dirty="0"/>
+              <a:t>.</a:t>
+            </a:r>
+          </a:p>
+          <a:p>
+            <a:pPr>
+              <a:lnSpc>
+                <a:spcPct val="150000"/>
+              </a:lnSpc>
+            </a:pPr>
+            <a:r>
+              <a:rPr lang="en-US" sz="1400" dirty="0"/>
+              <a:t>* Se </a:t>
+            </a:r>
+            <a:r>
+              <a:rPr lang="en-US" sz="1400" dirty="0" err="1"/>
+              <a:t>ajustaron</a:t>
+            </a:r>
+            <a:r>
+              <a:rPr lang="en-US" sz="1400" dirty="0"/>
+              <a:t> </a:t>
+            </a:r>
+            <a:r>
+              <a:rPr lang="en-US" sz="1400" dirty="0" err="1"/>
+              <a:t>todas</a:t>
+            </a:r>
+            <a:r>
+              <a:rPr lang="en-US" sz="1400" dirty="0"/>
+              <a:t> las </a:t>
+            </a:r>
+            <a:r>
+              <a:rPr lang="en-US" sz="1400" dirty="0" err="1"/>
+              <a:t>tablas</a:t>
+            </a:r>
+            <a:r>
+              <a:rPr lang="en-US" sz="1400" dirty="0"/>
+              <a:t> al </a:t>
+            </a:r>
+            <a:r>
+              <a:rPr lang="en-US" sz="1400" dirty="0" err="1"/>
+              <a:t>margen</a:t>
+            </a:r>
+            <a:r>
+              <a:rPr lang="en-US" sz="1400" dirty="0"/>
+              <a:t> de la memoria.</a:t>
+            </a:r>
+          </a:p>
+          <a:p>
+            <a:pPr>
+              <a:lnSpc>
+                <a:spcPct val="150000"/>
+              </a:lnSpc>
+            </a:pPr>
+            <a:r>
+              <a:rPr lang="en-US" sz="1400" dirty="0"/>
+              <a:t>* Se </a:t>
+            </a:r>
+            <a:r>
+              <a:rPr lang="en-US" sz="1400" dirty="0" err="1"/>
+              <a:t>ajustaron</a:t>
+            </a:r>
+            <a:r>
+              <a:rPr lang="en-US" sz="1400" dirty="0"/>
+              <a:t> las </a:t>
+            </a:r>
+            <a:r>
+              <a:rPr lang="en-US" sz="1400" dirty="0" err="1"/>
+              <a:t>imágenes</a:t>
+            </a:r>
+            <a:r>
+              <a:rPr lang="en-US" sz="1400" dirty="0"/>
+              <a:t>.</a:t>
+            </a:r>
+          </a:p>
+          <a:p>
+            <a:pPr>
+              <a:lnSpc>
+                <a:spcPct val="150000"/>
+              </a:lnSpc>
+            </a:pPr>
+            <a:r>
+              <a:rPr lang="en-US" sz="1400" dirty="0"/>
+              <a:t>* Se </a:t>
+            </a:r>
+            <a:r>
+              <a:rPr lang="en-US" sz="1400" dirty="0" err="1"/>
+              <a:t>enumeraron</a:t>
+            </a:r>
+            <a:r>
+              <a:rPr lang="en-US" sz="1400" dirty="0"/>
+              <a:t> también </a:t>
+            </a:r>
+            <a:r>
+              <a:rPr lang="en-US" sz="1400" dirty="0" err="1"/>
+              <a:t>los</a:t>
+            </a:r>
+            <a:r>
+              <a:rPr lang="en-US" sz="1400" dirty="0"/>
+              <a:t> </a:t>
+            </a:r>
+            <a:r>
+              <a:rPr lang="en-US" sz="1400" dirty="0" err="1"/>
+              <a:t>capítulos</a:t>
+            </a:r>
+            <a:r>
+              <a:rPr lang="en-US" sz="1400" dirty="0"/>
+              <a:t> de las </a:t>
+            </a:r>
+            <a:r>
+              <a:rPr lang="en-US" sz="1400" dirty="0" err="1"/>
+              <a:t>conclusiones</a:t>
+            </a:r>
+            <a:r>
+              <a:rPr lang="en-US" sz="1400" dirty="0"/>
+              <a:t> de </a:t>
+            </a:r>
+            <a:r>
+              <a:rPr lang="en-US" sz="1400" dirty="0" err="1"/>
+              <a:t>cada</a:t>
+            </a:r>
+            <a:r>
+              <a:rPr lang="en-US" sz="1400" dirty="0"/>
+              <a:t> </a:t>
+            </a:r>
+            <a:r>
+              <a:rPr lang="en-US" sz="1400" dirty="0" err="1"/>
+              <a:t>capítulo</a:t>
+            </a:r>
+            <a:r>
+              <a:rPr lang="en-US" sz="1400" dirty="0"/>
+              <a:t>.</a:t>
+            </a:r>
+          </a:p>
+          <a:p>
+            <a:pPr>
+              <a:lnSpc>
+                <a:spcPct val="150000"/>
+              </a:lnSpc>
+            </a:pPr>
+            <a:r>
+              <a:rPr lang="en-US" sz="1400" dirty="0"/>
+              <a:t>* En el manual de </a:t>
+            </a:r>
+            <a:r>
+              <a:rPr lang="en-US" sz="1400" dirty="0" err="1"/>
+              <a:t>usuario</a:t>
+            </a:r>
+            <a:r>
+              <a:rPr lang="en-US" sz="1400" dirty="0"/>
+              <a:t>, </a:t>
+            </a:r>
+            <a:r>
+              <a:rPr lang="en-US" sz="1400" dirty="0" err="1"/>
+              <a:t>los</a:t>
+            </a:r>
+            <a:r>
+              <a:rPr lang="en-US" sz="1400" dirty="0"/>
+              <a:t> </a:t>
+            </a:r>
+            <a:r>
+              <a:rPr lang="en-US" sz="1400" dirty="0" err="1"/>
+              <a:t>bloques</a:t>
+            </a:r>
+            <a:r>
+              <a:rPr lang="en-US" sz="1400" dirty="0"/>
+              <a:t> de </a:t>
+            </a:r>
+            <a:r>
+              <a:rPr lang="en-US" sz="1400" dirty="0" err="1"/>
+              <a:t>código</a:t>
+            </a:r>
+            <a:r>
+              <a:rPr lang="en-US" sz="1400" dirty="0"/>
+              <a:t> </a:t>
+            </a:r>
+            <a:r>
+              <a:rPr lang="en-US" sz="1400" dirty="0" err="1"/>
+              <a:t>ya</a:t>
+            </a:r>
+            <a:r>
+              <a:rPr lang="en-US" sz="1400" dirty="0"/>
+              <a:t> no se </a:t>
+            </a:r>
+            <a:r>
+              <a:rPr lang="en-US" sz="1400" dirty="0" err="1"/>
+              <a:t>introducen</a:t>
+            </a:r>
+            <a:r>
+              <a:rPr lang="en-US" sz="1400" dirty="0"/>
+              <a:t> con dos puntos (:)</a:t>
+            </a:r>
+          </a:p>
+          <a:p>
+            <a:pPr>
+              <a:lnSpc>
+                <a:spcPct val="150000"/>
+              </a:lnSpc>
+            </a:pPr>
+            <a:r>
+              <a:rPr lang="en-US" sz="1400" dirty="0"/>
+              <a:t>* </a:t>
+            </a:r>
+            <a:r>
+              <a:rPr lang="en-US" sz="1400" dirty="0" err="1"/>
+              <a:t>Añadido</a:t>
+            </a:r>
+            <a:r>
+              <a:rPr lang="en-US" sz="1400" dirty="0"/>
+              <a:t> un </a:t>
+            </a:r>
+            <a:r>
+              <a:rPr lang="en-US" sz="1400" dirty="0" err="1"/>
+              <a:t>apartado</a:t>
+            </a:r>
+            <a:r>
+              <a:rPr lang="en-US" sz="1400" dirty="0"/>
+              <a:t> de </a:t>
+            </a:r>
+            <a:r>
+              <a:rPr lang="en-US" sz="1400" dirty="0" err="1"/>
+              <a:t>conclusiones</a:t>
+            </a:r>
+            <a:r>
+              <a:rPr lang="en-US" sz="1400" dirty="0"/>
+              <a:t> del </a:t>
+            </a:r>
+            <a:r>
+              <a:rPr lang="en-US" sz="1400" dirty="0" err="1"/>
+              <a:t>capítulo</a:t>
+            </a:r>
+            <a:r>
+              <a:rPr lang="en-US" sz="1400" dirty="0"/>
+              <a:t> </a:t>
+            </a:r>
+            <a:r>
+              <a:rPr lang="en-US" sz="1400" dirty="0" err="1"/>
+              <a:t>en</a:t>
+            </a:r>
+            <a:r>
+              <a:rPr lang="en-US" sz="1400" dirty="0"/>
+              <a:t> el manual de </a:t>
+            </a:r>
+            <a:r>
+              <a:rPr lang="en-US" sz="1400" dirty="0" err="1"/>
+              <a:t>usuario</a:t>
+            </a:r>
+            <a:r>
+              <a:rPr lang="en-US" sz="1400" dirty="0"/>
+              <a:t>.</a:t>
+            </a:r>
+          </a:p>
+          <a:p>
+            <a:pPr>
+              <a:lnSpc>
+                <a:spcPct val="150000"/>
+              </a:lnSpc>
+            </a:pPr>
+            <a:r>
+              <a:rPr lang="en-US" sz="1400" dirty="0"/>
+              <a:t>* </a:t>
+            </a:r>
+            <a:r>
+              <a:rPr lang="en-US" sz="1400" dirty="0" err="1"/>
+              <a:t>Corregidas</a:t>
+            </a:r>
+            <a:r>
+              <a:rPr lang="en-US" sz="1400" dirty="0"/>
+              <a:t> dos medias </a:t>
+            </a:r>
+            <a:r>
+              <a:rPr lang="en-US" sz="1400" dirty="0" err="1"/>
+              <a:t>desactualizadas</a:t>
+            </a:r>
+            <a:r>
+              <a:rPr lang="en-US" sz="1400" dirty="0"/>
+              <a:t> </a:t>
+            </a:r>
+            <a:r>
+              <a:rPr lang="en-US" sz="1400" dirty="0" err="1"/>
+              <a:t>en</a:t>
+            </a:r>
+            <a:r>
+              <a:rPr lang="en-US" sz="1400" dirty="0"/>
+              <a:t> las </a:t>
+            </a:r>
+            <a:r>
+              <a:rPr lang="en-US" sz="1400" dirty="0" err="1"/>
+              <a:t>siluetas</a:t>
+            </a:r>
+            <a:r>
+              <a:rPr lang="en-US" sz="1400" dirty="0"/>
+              <a:t> del </a:t>
+            </a:r>
+            <a:r>
+              <a:rPr lang="en-US" sz="1400" dirty="0" err="1"/>
+              <a:t>capítulo</a:t>
+            </a:r>
+            <a:r>
+              <a:rPr lang="en-US" sz="1400" dirty="0"/>
+              <a:t> 4</a:t>
+            </a:r>
+          </a:p>
+          <a:p>
+            <a:pPr>
+              <a:lnSpc>
+                <a:spcPct val="150000"/>
+              </a:lnSpc>
+            </a:pPr>
+            <a:r>
+              <a:rPr lang="en-US" sz="1400" dirty="0"/>
+              <a:t>* </a:t>
+            </a:r>
+            <a:r>
+              <a:rPr lang="en-US" sz="1400" dirty="0" err="1"/>
+              <a:t>Añadido</a:t>
+            </a:r>
+            <a:r>
+              <a:rPr lang="en-US" sz="1400" dirty="0"/>
+              <a:t> un </a:t>
+            </a:r>
+            <a:r>
+              <a:rPr lang="en-US" sz="1400" dirty="0" err="1"/>
+              <a:t>apartado</a:t>
+            </a:r>
+            <a:r>
+              <a:rPr lang="en-US" sz="1400" dirty="0"/>
+              <a:t> de </a:t>
+            </a:r>
+            <a:r>
+              <a:rPr lang="en-US" sz="1400" dirty="0" err="1"/>
+              <a:t>marco</a:t>
+            </a:r>
+            <a:r>
+              <a:rPr lang="en-US" sz="1400" dirty="0"/>
+              <a:t> </a:t>
+            </a:r>
+            <a:r>
+              <a:rPr lang="en-US" sz="1400" dirty="0" err="1"/>
+              <a:t>metodológico</a:t>
+            </a:r>
+            <a:r>
+              <a:rPr lang="en-US" sz="1400" dirty="0"/>
+              <a:t> </a:t>
+            </a:r>
+            <a:r>
+              <a:rPr lang="en-US" sz="1400" dirty="0" err="1"/>
+              <a:t>en</a:t>
+            </a:r>
+            <a:r>
+              <a:rPr lang="en-US" sz="1400" dirty="0"/>
+              <a:t> la </a:t>
+            </a:r>
+            <a:r>
+              <a:rPr lang="en-US" sz="1400" dirty="0" err="1"/>
+              <a:t>sección</a:t>
+            </a:r>
+            <a:r>
+              <a:rPr lang="en-US" sz="1400" dirty="0"/>
+              <a:t> 3.2</a:t>
+            </a:r>
+          </a:p>
+          <a:p>
+            <a:pPr>
+              <a:lnSpc>
+                <a:spcPct val="150000"/>
+              </a:lnSpc>
+            </a:pPr>
             <a:r>
               <a:rPr lang="en-US" sz="1400" dirty="0"/>
               <a:t>* </a:t>
@@ -18900,734 +20291,7 @@
             <a:endParaRPr lang="en-US" sz="1400" dirty="0"/>
           </a:p>
           <a:p>
-            <a:r>
-              <a:rPr lang="en-US" sz="1400" dirty="0"/>
-              <a:t>* La url del github tiene un typo (</a:t>
-            </a:r>
-            <a:r>
-              <a:rPr lang="en-US" sz="1400" dirty="0">
-                <a:hlinkClick r:id="rId4"/>
-              </a:rPr>
-              <a:t>https://github.com/crismo04/TFM-cloud-soliutions-to-public-data/</a:t>
-            </a:r>
-            <a:r>
-              <a:rPr lang="en-US" sz="1400" dirty="0"/>
-              <a:t>)</a:t>
-            </a:r>
-          </a:p>
-          <a:p>
-            <a:r>
-              <a:rPr lang="en-US" sz="1400" dirty="0"/>
-              <a:t>*</a:t>
-            </a:r>
-            <a:r>
-              <a:rPr lang="en-US" sz="1400" dirty="0" err="1"/>
-              <a:t>unificar</a:t>
-            </a:r>
-            <a:r>
-              <a:rPr lang="en-US" sz="1400" dirty="0"/>
-              <a:t> </a:t>
-            </a:r>
-            <a:r>
-              <a:rPr lang="en-US" sz="1400" dirty="0" err="1"/>
-              <a:t>todo</a:t>
-            </a:r>
-            <a:r>
-              <a:rPr lang="en-US" sz="1400" dirty="0"/>
-              <a:t> a python o python3 (vertex </a:t>
-            </a:r>
-            <a:r>
-              <a:rPr lang="en-US" sz="1400" dirty="0" err="1"/>
-              <a:t>usa</a:t>
-            </a:r>
-            <a:r>
-              <a:rPr lang="en-US" sz="1400" dirty="0"/>
-              <a:t> python3) </a:t>
-            </a:r>
-          </a:p>
-          <a:p>
-            <a:r>
-              <a:rPr lang="en-US" sz="1400" dirty="0"/>
-              <a:t>* </a:t>
-            </a:r>
-            <a:r>
-              <a:rPr lang="en-US" sz="1400" dirty="0" err="1"/>
-              <a:t>Correcciones</a:t>
-            </a:r>
-            <a:r>
-              <a:rPr lang="en-US" sz="1400" dirty="0"/>
-              <a:t> de </a:t>
-            </a:r>
-            <a:r>
-              <a:rPr lang="en-US" sz="1400" dirty="0" err="1"/>
-              <a:t>algunos</a:t>
-            </a:r>
-            <a:r>
-              <a:rPr lang="en-US" sz="1400" dirty="0"/>
-              <a:t> enlaces </a:t>
-            </a:r>
-            <a:r>
-              <a:rPr lang="en-US" sz="1400" dirty="0" err="1"/>
-              <a:t>dañados</a:t>
-            </a:r>
-            <a:r>
-              <a:rPr lang="en-US" sz="1400" dirty="0"/>
-              <a:t>.</a:t>
-            </a:r>
-          </a:p>
-          <a:p>
-            <a:r>
-              <a:rPr lang="en-US" sz="1400" dirty="0"/>
-              <a:t>* Los enlaces </a:t>
-            </a:r>
-            <a:r>
-              <a:rPr lang="en-US" sz="1400" dirty="0" err="1"/>
-              <a:t>clicables</a:t>
-            </a:r>
-            <a:r>
-              <a:rPr lang="en-US" sz="1400" dirty="0"/>
-              <a:t> de la </a:t>
-            </a:r>
-            <a:r>
-              <a:rPr lang="en-US" sz="1400" dirty="0" err="1"/>
-              <a:t>introducción</a:t>
-            </a:r>
-            <a:r>
-              <a:rPr lang="en-US" sz="1400" dirty="0"/>
-              <a:t>, </a:t>
-            </a:r>
-            <a:r>
-              <a:rPr lang="en-US" sz="1400" dirty="0" err="1"/>
-              <a:t>en</a:t>
-            </a:r>
-            <a:r>
-              <a:rPr lang="en-US" sz="1400" dirty="0"/>
-              <a:t> </a:t>
-            </a:r>
-            <a:r>
-              <a:rPr lang="en-US" sz="1400" dirty="0" err="1"/>
-              <a:t>cursiva</a:t>
-            </a:r>
-            <a:r>
-              <a:rPr lang="en-US" sz="1400" dirty="0"/>
-              <a:t>.</a:t>
-            </a:r>
-          </a:p>
-          <a:p>
-            <a:r>
-              <a:rPr lang="en-US" sz="1400" dirty="0"/>
-              <a:t>* Cambio </a:t>
-            </a:r>
-            <a:r>
-              <a:rPr lang="en-US" sz="1400" dirty="0" err="1"/>
-              <a:t>en</a:t>
-            </a:r>
-            <a:r>
-              <a:rPr lang="en-US" sz="1400" dirty="0"/>
-              <a:t> </a:t>
-            </a:r>
-            <a:r>
-              <a:rPr lang="en-US" sz="1400" dirty="0" err="1"/>
-              <a:t>algunos</a:t>
-            </a:r>
-            <a:r>
-              <a:rPr lang="en-US" sz="1400" dirty="0"/>
-              <a:t> </a:t>
-            </a:r>
-            <a:r>
-              <a:rPr lang="en-US" sz="1400" dirty="0" err="1"/>
-              <a:t>títulos</a:t>
-            </a:r>
-            <a:r>
-              <a:rPr lang="en-US" sz="1400" dirty="0"/>
-              <a:t> de </a:t>
-            </a:r>
-            <a:r>
-              <a:rPr lang="en-US" sz="1400" dirty="0" err="1"/>
-              <a:t>sección</a:t>
-            </a:r>
-            <a:r>
-              <a:rPr lang="en-US" sz="1400" dirty="0"/>
-              <a:t> </a:t>
-            </a:r>
-            <a:r>
-              <a:rPr lang="en-US" sz="1400" dirty="0" err="1"/>
-              <a:t>por</a:t>
-            </a:r>
-            <a:r>
-              <a:rPr lang="en-US" sz="1400" dirty="0"/>
-              <a:t> </a:t>
-            </a:r>
-            <a:r>
-              <a:rPr lang="en-US" sz="1400" dirty="0" err="1"/>
-              <a:t>repetitivos</a:t>
-            </a:r>
-            <a:r>
-              <a:rPr lang="en-US" sz="1400" dirty="0"/>
-              <a:t>.</a:t>
-            </a:r>
-          </a:p>
-          <a:p>
-            <a:r>
-              <a:rPr lang="en-US" sz="1400" dirty="0"/>
-              <a:t>* </a:t>
-            </a:r>
-            <a:r>
-              <a:rPr lang="en-US" sz="1400" dirty="0" err="1"/>
-              <a:t>Mejoras</a:t>
-            </a:r>
-            <a:r>
-              <a:rPr lang="en-US" sz="1400" dirty="0"/>
-              <a:t> de </a:t>
-            </a:r>
-            <a:r>
-              <a:rPr lang="en-US" sz="1400" dirty="0" err="1"/>
-              <a:t>redacción</a:t>
-            </a:r>
-            <a:r>
-              <a:rPr lang="en-US" sz="1400" dirty="0"/>
-              <a:t> </a:t>
-            </a:r>
-            <a:r>
-              <a:rPr lang="en-US" sz="1400" dirty="0" err="1"/>
-              <a:t>propuestas</a:t>
-            </a:r>
-            <a:r>
-              <a:rPr lang="en-US" sz="1400" dirty="0"/>
-              <a:t> </a:t>
-            </a:r>
-            <a:r>
-              <a:rPr lang="en-US" sz="1400" dirty="0" err="1"/>
-              <a:t>por</a:t>
-            </a:r>
-            <a:r>
-              <a:rPr lang="en-US" sz="1400" dirty="0"/>
-              <a:t> </a:t>
-            </a:r>
-            <a:r>
-              <a:rPr lang="en-US" sz="1400" dirty="0" err="1"/>
-              <a:t>los</a:t>
-            </a:r>
-            <a:r>
-              <a:rPr lang="en-US" sz="1400" dirty="0"/>
-              <a:t> </a:t>
-            </a:r>
-            <a:r>
-              <a:rPr lang="en-US" sz="1400" dirty="0" err="1"/>
-              <a:t>tutores</a:t>
-            </a:r>
-            <a:r>
-              <a:rPr lang="en-US" sz="1400" dirty="0"/>
-              <a:t>.</a:t>
-            </a:r>
-          </a:p>
-          <a:p>
-            <a:r>
-              <a:rPr lang="en-US" sz="1400" dirty="0"/>
-              <a:t>* </a:t>
-            </a:r>
-            <a:r>
-              <a:rPr lang="en-US" sz="1400" dirty="0" err="1"/>
-              <a:t>Correcciones</a:t>
-            </a:r>
-            <a:r>
-              <a:rPr lang="en-US" sz="1400" dirty="0"/>
-              <a:t> </a:t>
-            </a:r>
-            <a:r>
-              <a:rPr lang="en-US" sz="1400" dirty="0" err="1"/>
-              <a:t>ortográficas</a:t>
-            </a:r>
-            <a:r>
-              <a:rPr lang="en-US" sz="1400" dirty="0"/>
-              <a:t> (</a:t>
-            </a:r>
-            <a:r>
-              <a:rPr lang="en-US" sz="1400" dirty="0" err="1"/>
-              <a:t>incluido</a:t>
-            </a:r>
-            <a:r>
-              <a:rPr lang="en-US" sz="1400" dirty="0"/>
-              <a:t> </a:t>
-            </a:r>
-            <a:r>
-              <a:rPr lang="en-US" sz="1400" dirty="0" err="1"/>
-              <a:t>este</a:t>
-            </a:r>
-            <a:r>
-              <a:rPr lang="en-US" sz="1400" dirty="0"/>
-              <a:t> changelog).</a:t>
-            </a:r>
-          </a:p>
-          <a:p>
-            <a:r>
-              <a:rPr lang="en-US" sz="1400" dirty="0"/>
-              <a:t>* Se </a:t>
-            </a:r>
-            <a:r>
-              <a:rPr lang="en-US" sz="1400" dirty="0" err="1"/>
-              <a:t>redirige</a:t>
-            </a:r>
-            <a:r>
-              <a:rPr lang="en-US" sz="1400" dirty="0"/>
-              <a:t> a la </a:t>
-            </a:r>
-            <a:r>
-              <a:rPr lang="en-US" sz="1400" dirty="0" err="1"/>
-              <a:t>definición</a:t>
-            </a:r>
-            <a:r>
-              <a:rPr lang="en-US" sz="1400" dirty="0"/>
-              <a:t> de </a:t>
-            </a:r>
-            <a:r>
-              <a:rPr lang="en-US" sz="1400" dirty="0" err="1"/>
-              <a:t>arquitectura</a:t>
-            </a:r>
-            <a:r>
-              <a:rPr lang="en-US" sz="1400" dirty="0"/>
-              <a:t> de </a:t>
-            </a:r>
-            <a:r>
-              <a:rPr lang="en-US" sz="1400" dirty="0" err="1"/>
-              <a:t>medalla</a:t>
-            </a:r>
-            <a:r>
-              <a:rPr lang="en-US" sz="1400" dirty="0"/>
-              <a:t> </a:t>
-            </a:r>
-            <a:r>
-              <a:rPr lang="en-US" sz="1400" dirty="0" err="1"/>
-              <a:t>en</a:t>
-            </a:r>
-            <a:r>
-              <a:rPr lang="en-US" sz="1400" dirty="0"/>
-              <a:t> el </a:t>
-            </a:r>
-            <a:r>
-              <a:rPr lang="en-US" sz="1400" dirty="0" err="1"/>
-              <a:t>capítulo</a:t>
-            </a:r>
-            <a:r>
-              <a:rPr lang="en-US" sz="1400" dirty="0"/>
-              <a:t> de </a:t>
-            </a:r>
-            <a:r>
-              <a:rPr lang="en-US" sz="1400" dirty="0" err="1"/>
-              <a:t>estado</a:t>
-            </a:r>
-            <a:r>
-              <a:rPr lang="en-US" sz="1400" dirty="0"/>
-              <a:t> de la </a:t>
-            </a:r>
-            <a:r>
-              <a:rPr lang="en-US" sz="1400" dirty="0" err="1"/>
-              <a:t>cuestión</a:t>
-            </a:r>
-            <a:r>
-              <a:rPr lang="en-US" sz="1400" dirty="0"/>
-              <a:t>.</a:t>
-            </a:r>
-          </a:p>
-          <a:p>
-            <a:r>
-              <a:rPr lang="en-US" sz="1400" dirty="0"/>
-              <a:t>* Se </a:t>
-            </a:r>
-            <a:r>
-              <a:rPr lang="en-US" sz="1400" dirty="0" err="1"/>
-              <a:t>ajustaron</a:t>
-            </a:r>
-            <a:r>
-              <a:rPr lang="en-US" sz="1400" dirty="0"/>
-              <a:t> </a:t>
-            </a:r>
-            <a:r>
-              <a:rPr lang="en-US" sz="1400" dirty="0" err="1"/>
-              <a:t>todas</a:t>
-            </a:r>
-            <a:r>
-              <a:rPr lang="en-US" sz="1400" dirty="0"/>
-              <a:t> las </a:t>
-            </a:r>
-            <a:r>
-              <a:rPr lang="en-US" sz="1400" dirty="0" err="1"/>
-              <a:t>tablas</a:t>
-            </a:r>
-            <a:r>
-              <a:rPr lang="en-US" sz="1400" dirty="0"/>
-              <a:t> al </a:t>
-            </a:r>
-            <a:r>
-              <a:rPr lang="en-US" sz="1400" dirty="0" err="1"/>
-              <a:t>margen</a:t>
-            </a:r>
-            <a:r>
-              <a:rPr lang="en-US" sz="1400" dirty="0"/>
-              <a:t> de la memoria.</a:t>
-            </a:r>
-          </a:p>
-          <a:p>
-            <a:r>
-              <a:rPr lang="en-US" sz="1400" dirty="0"/>
-              <a:t>* Se </a:t>
-            </a:r>
-            <a:r>
-              <a:rPr lang="en-US" sz="1400" dirty="0" err="1"/>
-              <a:t>ajustaron</a:t>
-            </a:r>
-            <a:r>
-              <a:rPr lang="en-US" sz="1400" dirty="0"/>
-              <a:t> las </a:t>
-            </a:r>
-            <a:r>
-              <a:rPr lang="en-US" sz="1400" dirty="0" err="1"/>
-              <a:t>imágenes</a:t>
-            </a:r>
-            <a:r>
-              <a:rPr lang="en-US" sz="1400" dirty="0"/>
-              <a:t>.</a:t>
-            </a:r>
-          </a:p>
-          <a:p>
-            <a:r>
-              <a:rPr lang="en-US" sz="1400" dirty="0"/>
-              <a:t>* Se </a:t>
-            </a:r>
-            <a:r>
-              <a:rPr lang="en-US" sz="1400" dirty="0" err="1"/>
-              <a:t>enumeraron</a:t>
-            </a:r>
-            <a:r>
-              <a:rPr lang="en-US" sz="1400" dirty="0"/>
-              <a:t> también </a:t>
-            </a:r>
-            <a:r>
-              <a:rPr lang="en-US" sz="1400" dirty="0" err="1"/>
-              <a:t>los</a:t>
-            </a:r>
-            <a:r>
-              <a:rPr lang="en-US" sz="1400" dirty="0"/>
-              <a:t> </a:t>
-            </a:r>
-            <a:r>
-              <a:rPr lang="en-US" sz="1400" dirty="0" err="1"/>
-              <a:t>capítulos</a:t>
-            </a:r>
-            <a:r>
-              <a:rPr lang="en-US" sz="1400" dirty="0"/>
-              <a:t> de las </a:t>
-            </a:r>
-            <a:r>
-              <a:rPr lang="en-US" sz="1400" dirty="0" err="1"/>
-              <a:t>conclusiones</a:t>
-            </a:r>
-            <a:r>
-              <a:rPr lang="en-US" sz="1400" dirty="0"/>
-              <a:t> de </a:t>
-            </a:r>
-            <a:r>
-              <a:rPr lang="en-US" sz="1400" dirty="0" err="1"/>
-              <a:t>cada</a:t>
-            </a:r>
-            <a:r>
-              <a:rPr lang="en-US" sz="1400" dirty="0"/>
-              <a:t> </a:t>
-            </a:r>
-            <a:r>
-              <a:rPr lang="en-US" sz="1400" dirty="0" err="1"/>
-              <a:t>capítulo</a:t>
-            </a:r>
-            <a:r>
-              <a:rPr lang="en-US" sz="1400" dirty="0"/>
-              <a:t>.</a:t>
-            </a:r>
-          </a:p>
-          <a:p>
-            <a:r>
-              <a:rPr lang="en-US" sz="1400" dirty="0"/>
-              <a:t>* En el manual de </a:t>
-            </a:r>
-            <a:r>
-              <a:rPr lang="en-US" sz="1400" dirty="0" err="1"/>
-              <a:t>usuario</a:t>
-            </a:r>
-            <a:r>
-              <a:rPr lang="en-US" sz="1400" dirty="0"/>
-              <a:t>, </a:t>
-            </a:r>
-            <a:r>
-              <a:rPr lang="en-US" sz="1400" dirty="0" err="1"/>
-              <a:t>los</a:t>
-            </a:r>
-            <a:r>
-              <a:rPr lang="en-US" sz="1400" dirty="0"/>
-              <a:t> </a:t>
-            </a:r>
-            <a:r>
-              <a:rPr lang="en-US" sz="1400" dirty="0" err="1"/>
-              <a:t>bloques</a:t>
-            </a:r>
-            <a:r>
-              <a:rPr lang="en-US" sz="1400" dirty="0"/>
-              <a:t> de </a:t>
-            </a:r>
-            <a:r>
-              <a:rPr lang="en-US" sz="1400" dirty="0" err="1"/>
-              <a:t>código</a:t>
-            </a:r>
-            <a:r>
-              <a:rPr lang="en-US" sz="1400" dirty="0"/>
-              <a:t> </a:t>
-            </a:r>
-            <a:r>
-              <a:rPr lang="en-US" sz="1400" dirty="0" err="1"/>
-              <a:t>estaban</a:t>
-            </a:r>
-            <a:r>
-              <a:rPr lang="en-US" sz="1400" dirty="0"/>
-              <a:t> mal </a:t>
-            </a:r>
-            <a:r>
-              <a:rPr lang="en-US" sz="1400" dirty="0" err="1"/>
-              <a:t>organizados</a:t>
-            </a:r>
-            <a:r>
-              <a:rPr lang="en-US" sz="1400" dirty="0"/>
-              <a:t>, no se </a:t>
-            </a:r>
-            <a:r>
-              <a:rPr lang="en-US" sz="1400" dirty="0" err="1"/>
-              <a:t>colocaban</a:t>
-            </a:r>
-            <a:r>
-              <a:rPr lang="en-US" sz="1400" dirty="0"/>
-              <a:t> </a:t>
-            </a:r>
-            <a:r>
-              <a:rPr lang="en-US" sz="1400" dirty="0" err="1"/>
-              <a:t>después</a:t>
-            </a:r>
-            <a:r>
-              <a:rPr lang="en-US" sz="1400" dirty="0"/>
-              <a:t> de </a:t>
-            </a:r>
-            <a:r>
-              <a:rPr lang="en-US" sz="1400" dirty="0" err="1"/>
-              <a:t>los</a:t>
-            </a:r>
-            <a:r>
-              <a:rPr lang="en-US" sz="1400" dirty="0"/>
-              <a:t> dos puntos. Se ha </a:t>
-            </a:r>
-            <a:r>
-              <a:rPr lang="en-US" sz="1400" dirty="0" err="1"/>
-              <a:t>cambiado</a:t>
-            </a:r>
-            <a:r>
-              <a:rPr lang="en-US" sz="1400" dirty="0"/>
-              <a:t> la </a:t>
-            </a:r>
-            <a:r>
-              <a:rPr lang="en-US" sz="1400" dirty="0" err="1"/>
-              <a:t>manera</a:t>
-            </a:r>
-            <a:r>
-              <a:rPr lang="en-US" sz="1400" dirty="0"/>
-              <a:t> de </a:t>
-            </a:r>
-            <a:r>
-              <a:rPr lang="en-US" sz="1400" dirty="0" err="1"/>
-              <a:t>introducirlos</a:t>
-            </a:r>
-            <a:r>
-              <a:rPr lang="en-US" sz="1400" dirty="0"/>
-              <a:t> </a:t>
-            </a:r>
-            <a:r>
-              <a:rPr lang="en-US" sz="1400" dirty="0" err="1"/>
-              <a:t>en</a:t>
-            </a:r>
-            <a:r>
-              <a:rPr lang="en-US" sz="1400" dirty="0"/>
-              <a:t> </a:t>
-            </a:r>
-            <a:r>
-              <a:rPr lang="en-US" sz="1400" dirty="0" err="1"/>
-              <a:t>los</a:t>
-            </a:r>
-            <a:r>
-              <a:rPr lang="en-US" sz="1400" dirty="0"/>
-              <a:t> </a:t>
-            </a:r>
-            <a:r>
-              <a:rPr lang="en-US" sz="1400" dirty="0" err="1"/>
-              <a:t>párrafos</a:t>
-            </a:r>
-            <a:r>
-              <a:rPr lang="en-US" sz="1400" dirty="0"/>
-              <a:t>.</a:t>
-            </a:r>
-          </a:p>
-          <a:p>
-            <a:r>
-              <a:rPr lang="en-US" sz="1400" dirty="0"/>
-              <a:t>* </a:t>
-            </a:r>
-            <a:r>
-              <a:rPr lang="en-US" sz="1400" dirty="0" err="1"/>
-              <a:t>Añadido</a:t>
-            </a:r>
-            <a:r>
-              <a:rPr lang="en-US" sz="1400" dirty="0"/>
-              <a:t> un </a:t>
-            </a:r>
-            <a:r>
-              <a:rPr lang="en-US" sz="1400" dirty="0" err="1"/>
-              <a:t>apartado</a:t>
-            </a:r>
-            <a:r>
-              <a:rPr lang="en-US" sz="1400" dirty="0"/>
-              <a:t> de </a:t>
-            </a:r>
-            <a:r>
-              <a:rPr lang="en-US" sz="1400" dirty="0" err="1"/>
-              <a:t>conclusiones</a:t>
-            </a:r>
-            <a:r>
-              <a:rPr lang="en-US" sz="1400" dirty="0"/>
-              <a:t> del </a:t>
-            </a:r>
-            <a:r>
-              <a:rPr lang="en-US" sz="1400" dirty="0" err="1"/>
-              <a:t>capítulo</a:t>
-            </a:r>
-            <a:r>
-              <a:rPr lang="en-US" sz="1400" dirty="0"/>
-              <a:t> </a:t>
-            </a:r>
-            <a:r>
-              <a:rPr lang="en-US" sz="1400" dirty="0" err="1"/>
-              <a:t>en</a:t>
-            </a:r>
-            <a:r>
-              <a:rPr lang="en-US" sz="1400" dirty="0"/>
-              <a:t> el manual de </a:t>
-            </a:r>
-            <a:r>
-              <a:rPr lang="en-US" sz="1400" dirty="0" err="1"/>
-              <a:t>usuario</a:t>
-            </a:r>
-            <a:r>
-              <a:rPr lang="en-US" sz="1400" dirty="0"/>
-              <a:t>.</a:t>
-            </a:r>
-          </a:p>
-          <a:p>
-            <a:r>
-              <a:rPr lang="en-US" sz="1400" dirty="0"/>
-              <a:t>* </a:t>
-            </a:r>
-            <a:r>
-              <a:rPr lang="en-US" sz="1400" dirty="0" err="1"/>
-              <a:t>Corregidas</a:t>
-            </a:r>
-            <a:r>
-              <a:rPr lang="en-US" sz="1400" dirty="0"/>
-              <a:t> dos medias </a:t>
-            </a:r>
-            <a:r>
-              <a:rPr lang="en-US" sz="1400" dirty="0" err="1"/>
-              <a:t>desactualizadas</a:t>
-            </a:r>
-            <a:r>
-              <a:rPr lang="en-US" sz="1400" dirty="0"/>
-              <a:t> </a:t>
-            </a:r>
-            <a:r>
-              <a:rPr lang="en-US" sz="1400" dirty="0" err="1"/>
-              <a:t>en</a:t>
-            </a:r>
-            <a:r>
-              <a:rPr lang="en-US" sz="1400" dirty="0"/>
-              <a:t> las </a:t>
-            </a:r>
-            <a:r>
-              <a:rPr lang="en-US" sz="1400" dirty="0" err="1"/>
-              <a:t>siluetas</a:t>
-            </a:r>
-            <a:r>
-              <a:rPr lang="en-US" sz="1400" dirty="0"/>
-              <a:t> del </a:t>
-            </a:r>
-            <a:r>
-              <a:rPr lang="en-US" sz="1400" dirty="0" err="1"/>
-              <a:t>capítulo</a:t>
-            </a:r>
-            <a:r>
-              <a:rPr lang="en-US" sz="1400" dirty="0"/>
-              <a:t> 4</a:t>
-            </a:r>
-          </a:p>
-          <a:p>
-            <a:r>
-              <a:rPr lang="en-US" sz="1400" dirty="0"/>
-              <a:t>* </a:t>
-            </a:r>
-            <a:r>
-              <a:rPr lang="en-US" sz="1400" dirty="0" err="1"/>
-              <a:t>Añadido</a:t>
-            </a:r>
-            <a:r>
-              <a:rPr lang="en-US" sz="1400" dirty="0"/>
-              <a:t> un </a:t>
-            </a:r>
-            <a:r>
-              <a:rPr lang="en-US" sz="1400" dirty="0" err="1"/>
-              <a:t>apartado</a:t>
-            </a:r>
-            <a:r>
-              <a:rPr lang="en-US" sz="1400" dirty="0"/>
-              <a:t> de </a:t>
-            </a:r>
-            <a:r>
-              <a:rPr lang="en-US" sz="1400" dirty="0" err="1"/>
-              <a:t>marco</a:t>
-            </a:r>
-            <a:r>
-              <a:rPr lang="en-US" sz="1400" dirty="0"/>
-              <a:t> </a:t>
-            </a:r>
-            <a:r>
-              <a:rPr lang="en-US" sz="1400" dirty="0" err="1"/>
-              <a:t>metodológico</a:t>
-            </a:r>
-            <a:r>
-              <a:rPr lang="en-US" sz="1400" dirty="0"/>
-              <a:t> </a:t>
-            </a:r>
-            <a:r>
-              <a:rPr lang="en-US" sz="1400" dirty="0" err="1"/>
-              <a:t>en</a:t>
-            </a:r>
-            <a:r>
-              <a:rPr lang="en-US" sz="1400" dirty="0"/>
-              <a:t> la </a:t>
-            </a:r>
-            <a:r>
-              <a:rPr lang="en-US" sz="1400" dirty="0" err="1"/>
-              <a:t>sección</a:t>
-            </a:r>
-            <a:r>
-              <a:rPr lang="en-US" sz="1400" dirty="0"/>
-              <a:t> 3.2</a:t>
-            </a:r>
-          </a:p>
-          <a:p>
-            <a:r>
-              <a:rPr lang="en-US" sz="1400" dirty="0"/>
-              <a:t>* Actualización de los readme.md del código</a:t>
-            </a:r>
+            <a:endParaRPr lang="en-US" sz="1400" dirty="0"/>
           </a:p>
         </p:txBody>
       </p:sp>
@@ -20507,13 +21171,13 @@
           <p:nvPr>
             <p:extLst>
               <p:ext uri="{D42A27DB-BD31-4B8C-83A1-F6EECF244321}">
-                <p14:modId xmlns:p14="http://schemas.microsoft.com/office/powerpoint/2010/main" val="651046228"/>
+                <p14:modId xmlns:p14="http://schemas.microsoft.com/office/powerpoint/2010/main" val="3588473684"/>
               </p:ext>
             </p:extLst>
           </p:nvPr>
         </p:nvGraphicFramePr>
         <p:xfrm>
-          <a:off x="566928" y="2069409"/>
+          <a:off x="566928" y="2413205"/>
           <a:ext cx="8010144" cy="2719182"/>
         </p:xfrm>
         <a:graphic>
@@ -21060,7 +21724,7 @@
         </p:nvSpPr>
         <p:spPr>
           <a:xfrm>
-            <a:off x="653433" y="5085184"/>
+            <a:off x="755576" y="5325013"/>
             <a:ext cx="8010144" cy="338554"/>
           </a:xfrm>
           <a:prstGeom prst="rect">
@@ -21177,8 +21841,8 @@
         </p:nvSpPr>
         <p:spPr>
           <a:xfrm>
-            <a:off x="755576" y="1380559"/>
-            <a:ext cx="8010144" cy="584775"/>
+            <a:off x="755576" y="1403342"/>
+            <a:ext cx="8010144" cy="830997"/>
           </a:xfrm>
           <a:prstGeom prst="rect">
             <a:avLst/>
@@ -21197,22 +21861,40 @@
               </a:spcAft>
             </a:pPr>
             <a:r>
-              <a:rPr sz="1600" b="1" dirty="0">
-                <a:solidFill>
-                  <a:srgbClr val="1F1F1F"/>
-                </a:solidFill>
-                <a:latin typeface="Calibri"/>
-              </a:rPr>
-              <a:t>• </a:t>
-            </a:r>
-            <a:r>
               <a:rPr lang="es-ES" sz="1600" b="1" dirty="0">
                 <a:solidFill>
                   <a:srgbClr val="1F1F1F"/>
                 </a:solidFill>
                 <a:latin typeface="Calibri"/>
               </a:rPr>
-              <a:t>Cualquiera de los tres campos tratados, por separado, acumula millones de trabajos, en este se ha intentado abarcar lo máximo posible.</a:t>
+              <a:t>Cualquiera de los tres campos estudiados, por separado, acumula millones de trabajos en recopiladores como </a:t>
+            </a:r>
+            <a:r>
+              <a:rPr lang="es-ES" sz="1600" b="1" i="1" dirty="0">
+                <a:solidFill>
+                  <a:srgbClr val="1F1F1F"/>
+                </a:solidFill>
+                <a:latin typeface="Calibri"/>
+              </a:rPr>
+              <a:t>Google </a:t>
+            </a:r>
+            <a:r>
+              <a:rPr lang="es-ES" sz="1600" b="1" i="1" dirty="0" err="1">
+                <a:solidFill>
+                  <a:srgbClr val="1F1F1F"/>
+                </a:solidFill>
+                <a:latin typeface="Calibri"/>
+              </a:rPr>
+              <a:t>scholar</a:t>
+            </a:r>
+            <a:r>
+              <a:rPr lang="es-ES" sz="1600" b="1" dirty="0">
+                <a:solidFill>
+                  <a:srgbClr val="1F1F1F"/>
+                </a:solidFill>
+                <a:latin typeface="Calibri"/>
+              </a:rPr>
+              <a:t>, en este trabajo se ha centrado en trabajos que involucren los tres campos, trabajos nacionales y los trabajos mas importantes de cada campo.</a:t>
             </a:r>
             <a:endParaRPr sz="1600" b="1" dirty="0">
               <a:solidFill>

--- a/master's thesis/TFM_MII_Cloud_AI_PublicData_MolinaCristian_2026.pptx
+++ b/master's thesis/TFM_MII_Cloud_AI_PublicData_MolinaCristian_2026.pptx
@@ -235,7 +235,7 @@
           <a:p>
             <a:fld id="{D64FF152-CFF9-43C9-9D88-2225BF089440}" type="datetimeFigureOut">
               <a:rPr lang="en-US" smtClean="0"/>
-              <a:t>9/17/2026</a:t>
+              <a:t>9/18/2026</a:t>
             </a:fld>
             <a:endParaRPr lang="en-US"/>
           </a:p>
@@ -16794,7 +16794,7 @@
         <p:spPr>
           <a:xfrm>
             <a:off x="2375756" y="1392955"/>
-            <a:ext cx="8280920" cy="1282402"/>
+            <a:ext cx="6372708" cy="1282402"/>
           </a:xfrm>
           <a:prstGeom prst="rect">
             <a:avLst/>
@@ -16828,7 +16828,7 @@
                 </a:solidFill>
                 <a:latin typeface="Calibri"/>
               </a:rPr>
-              <a:t>created worldwide (2025)</a:t>
+              <a:t>created worldwide each year (2025)</a:t>
             </a:r>
           </a:p>
           <a:p>
@@ -16878,7 +16878,7 @@
                 </a:solidFill>
                 <a:latin typeface="Calibri"/>
               </a:rPr>
-              <a:t>of Spanish firms use AI (2025) 			         		                            (</a:t>
+              <a:t>of Spanish firms use AI (2025) 			        (</a:t>
             </a:r>
             <a:r>
               <a:rPr lang="en-US" sz="1600" b="1" dirty="0">
@@ -16909,8 +16909,8 @@
         </p:nvSpPr>
         <p:spPr>
           <a:xfrm>
-            <a:off x="323528" y="3789040"/>
-            <a:ext cx="3888432" cy="2267287"/>
+            <a:off x="431540" y="3658025"/>
+            <a:ext cx="3888432" cy="2328843"/>
           </a:xfrm>
           <a:prstGeom prst="rect">
             <a:avLst/>
@@ -16959,22 +16959,13 @@
             </a:r>
           </a:p>
           <a:p>
-            <a:pPr lvl="1">
+            <a:pPr>
               <a:spcAft>
                 <a:spcPts val="1400"/>
               </a:spcAft>
             </a:pPr>
             <a:r>
-              <a:rPr lang="es-ES" sz="1600" b="1" dirty="0">
-                <a:solidFill>
-                  <a:srgbClr val="1F1F1F"/>
-                </a:solidFill>
-                <a:latin typeface="Calibri"/>
-              </a:rPr>
-              <a:t>- </a:t>
-            </a:r>
-            <a:r>
-              <a:rPr sz="1600" b="1" dirty="0">
+              <a:rPr b="1" dirty="0">
                 <a:solidFill>
                   <a:srgbClr val="1F1F1F"/>
                 </a:solidFill>
@@ -16983,7 +16974,7 @@
               <a:t>Can an automated process </a:t>
             </a:r>
             <a:r>
-              <a:rPr lang="es-ES" sz="1600" b="1" dirty="0">
+              <a:rPr lang="es-ES" b="1" dirty="0">
                 <a:solidFill>
                   <a:srgbClr val="1F1F1F"/>
                 </a:solidFill>
@@ -16992,7 +16983,7 @@
               <a:t>use </a:t>
             </a:r>
             <a:r>
-              <a:rPr lang="es-ES" sz="1600" b="1" dirty="0" err="1">
+              <a:rPr lang="es-ES" b="1" dirty="0" err="1">
                 <a:solidFill>
                   <a:srgbClr val="1F1F1F"/>
                 </a:solidFill>
@@ -17001,7 +16992,7 @@
               <a:t>public</a:t>
             </a:r>
             <a:r>
-              <a:rPr sz="1600" b="1" dirty="0">
+              <a:rPr b="1" dirty="0">
                 <a:solidFill>
                   <a:srgbClr val="1F1F1F"/>
                 </a:solidFill>
@@ -17010,7 +17001,7 @@
               <a:t> </a:t>
             </a:r>
             <a:r>
-              <a:rPr lang="es-ES" sz="1600" b="1" dirty="0">
+              <a:rPr lang="es-ES" b="1" dirty="0">
                 <a:solidFill>
                   <a:srgbClr val="1F1F1F"/>
                 </a:solidFill>
@@ -17019,7 +17010,7 @@
               <a:t>data</a:t>
             </a:r>
             <a:r>
-              <a:rPr sz="1600" b="1" dirty="0">
+              <a:rPr b="1" dirty="0">
                 <a:solidFill>
                   <a:srgbClr val="1F1F1F"/>
                 </a:solidFill>
@@ -17028,7 +17019,7 @@
               <a:t> with</a:t>
             </a:r>
             <a:r>
-              <a:rPr lang="es-ES" sz="1600" b="1" dirty="0">
+              <a:rPr lang="es-ES" b="1" dirty="0">
                 <a:solidFill>
                   <a:srgbClr val="1F1F1F"/>
                 </a:solidFill>
@@ -17037,7 +17028,7 @@
               <a:t> </a:t>
             </a:r>
             <a:r>
-              <a:rPr lang="es-ES" sz="1600" b="1" dirty="0" err="1">
+              <a:rPr lang="es-ES" b="1" dirty="0" err="1">
                 <a:solidFill>
                   <a:srgbClr val="1F1F1F"/>
                 </a:solidFill>
@@ -17046,7 +17037,7 @@
               <a:t>minimal</a:t>
             </a:r>
             <a:r>
-              <a:rPr sz="1600" b="1" dirty="0">
+              <a:rPr b="1" dirty="0">
                 <a:solidFill>
                   <a:srgbClr val="1F1F1F"/>
                 </a:solidFill>
@@ -17553,7 +17544,7 @@
         </p:nvSpPr>
         <p:spPr>
           <a:xfrm>
-            <a:off x="4873263" y="2890061"/>
+            <a:off x="4788024" y="2916707"/>
             <a:ext cx="4572000" cy="400110"/>
           </a:xfrm>
           <a:prstGeom prst="rect">
